--- a/insight/N+1/端侧内存管理全景-N1.pptx
+++ b/insight/N+1/端侧内存管理全景-N1.pptx
@@ -15,9 +15,10 @@
     <p:sldId id="263" r:id="rId9"/>
     <p:sldId id="264" r:id="rId10"/>
     <p:sldId id="265" r:id="rId11"/>
+    <p:sldId id="266" r:id="rId12"/>
   </p:sldIdLst>
   <p:notesMasterIdLst>
-    <p:notesMasterId r:id="rId12"/>
+    <p:notesMasterId r:id="rId13"/>
   </p:notesMasterIdLst>
   <p:sldSz cx="12191695" cy="6858000"/>
   <p:notesSz cx="6858000" cy="12191695"/>
@@ -623,6 +624,94 @@
             <a:fld id="{F7021451-1387-4CA6-816F-3879F97B5CBC}" type="slidenum">
               <a:rPr lang="en-US"/>
               <a:t>10</a:t>
+            </a:fld>
+            <a:endParaRPr lang="en-US"/>
+          </a:p>
+        </p:txBody>
+      </p:sp>
+    </p:spTree>
+    <p:extLst>
+      <p:ext uri="{BB962C8B-B14F-4D97-AF65-F5344CB8AC3E}">
+        <p14:creationId xmlns:p14="http://schemas.microsoft.com/office/powerpoint/2010/main" val="1024086991"/>
+      </p:ext>
+    </p:extLst>
+  </p:cSld>
+  <p:clrMapOvr>
+    <a:masterClrMapping/>
+  </p:clrMapOvr>
+</p:notes>
+</file>
+
+<file path=ppt/notesSlides/notesSlide11.xml><?xml version="1.0" encoding="utf-8"?>
+<p:notes xmlns:a="http://schemas.openxmlformats.org/drawingml/2006/main" xmlns:r="http://schemas.openxmlformats.org/officeDocument/2006/relationships" xmlns:p="http://schemas.openxmlformats.org/presentationml/2006/main">
+  <p:cSld>
+    <p:spTree>
+      <p:nvGrpSpPr>
+        <p:cNvPr id="1" name=""/>
+        <p:cNvGrpSpPr/>
+        <p:nvPr/>
+      </p:nvGrpSpPr>
+      <p:grpSpPr>
+        <a:xfrm>
+          <a:off x="0" y="0"/>
+          <a:ext cx="0" cy="0"/>
+          <a:chOff x="0" y="0"/>
+          <a:chExt cx="0" cy="0"/>
+        </a:xfrm>
+      </p:grpSpPr>
+      <p:sp>
+        <p:nvSpPr>
+          <p:cNvPr id="2" name="Slide Image Placeholder 1"/>
+          <p:cNvSpPr>
+            <a:spLocks noGrp="1" noRot="1" noChangeAspect="1"/>
+          </p:cNvSpPr>
+          <p:nvPr>
+            <p:ph type="sldImg"/>
+          </p:nvPr>
+        </p:nvSpPr>
+        <p:spPr/>
+      </p:sp>
+      <p:sp>
+        <p:nvSpPr>
+          <p:cNvPr id="3" name="Notes Placeholder 2"/>
+          <p:cNvSpPr>
+            <a:spLocks noGrp="1"/>
+          </p:cNvSpPr>
+          <p:nvPr>
+            <p:ph type="body" idx="1"/>
+          </p:nvPr>
+        </p:nvSpPr>
+        <p:spPr/>
+        <p:txBody>
+          <a:bodyPr/>
+          <a:lstStyle/>
+          <a:p>
+            <a:r>
+              <a:rPr lang="en-US" dirty="0"/>
+              <a:t/>
+            </a:r>
+            <a:endParaRPr lang="en-US" dirty="0"/>
+          </a:p>
+        </p:txBody>
+      </p:sp>
+      <p:sp>
+        <p:nvSpPr>
+          <p:cNvPr id="4" name="Slide Number Placeholder 3"/>
+          <p:cNvSpPr>
+            <a:spLocks noGrp="1"/>
+          </p:cNvSpPr>
+          <p:nvPr>
+            <p:ph type="sldNum" sz="quarter" idx="10"/>
+          </p:nvPr>
+        </p:nvSpPr>
+        <p:spPr/>
+        <p:txBody>
+          <a:bodyPr/>
+          <a:lstStyle/>
+          <a:p>
+            <a:fld id="{F7021451-1387-4CA6-816F-3879F97B5CBC}" type="slidenum">
+              <a:rPr lang="en-US"/>
+              <a:t>11</a:t>
             </a:fld>
             <a:endParaRPr lang="en-US"/>
           </a:p>
@@ -2317,6 +2406,861 @@
     <p:bg>
       <p:bgPr>
         <a:solidFill>
+          <a:srgbClr val="FFFFFF"/>
+        </a:solidFill>
+      </p:bgPr>
+    </p:bg>
+    <p:spTree>
+      <p:nvGrpSpPr>
+        <p:cNvPr id="1" name=""/>
+        <p:cNvGrpSpPr/>
+        <p:nvPr/>
+      </p:nvGrpSpPr>
+      <p:grpSpPr>
+        <a:xfrm>
+          <a:off x="0" y="0"/>
+          <a:ext cx="0" cy="0"/>
+          <a:chOff x="0" y="0"/>
+          <a:chExt cx="0" cy="0"/>
+        </a:xfrm>
+      </p:grpSpPr>
+      <p:sp>
+        <p:nvSpPr>
+          <p:cNvPr id="2" name="Shape 0"/>
+          <p:cNvSpPr/>
+          <p:nvPr/>
+        </p:nvSpPr>
+        <p:spPr>
+          <a:xfrm>
+            <a:off x="548640" y="411480"/>
+            <a:ext cx="640080" cy="640080"/>
+          </a:xfrm>
+          <a:prstGeom prst="ellipse">
+            <a:avLst/>
+          </a:prstGeom>
+          <a:solidFill>
+            <a:srgbClr val="7C3AED"/>
+          </a:solidFill>
+          <a:ln w="12700">
+            <a:solidFill>
+              <a:srgbClr val="7C3AED"/>
+            </a:solidFill>
+            <a:prstDash val="solid"/>
+          </a:ln>
+        </p:spPr>
+      </p:sp>
+      <p:sp>
+        <p:nvSpPr>
+          <p:cNvPr id="3" name="Text 1"/>
+          <p:cNvSpPr/>
+          <p:nvPr/>
+        </p:nvSpPr>
+        <p:spPr>
+          <a:xfrm>
+            <a:off x="548640" y="411480"/>
+            <a:ext cx="640080" cy="640080"/>
+          </a:xfrm>
+          <a:prstGeom prst="rect">
+            <a:avLst/>
+          </a:prstGeom>
+          <a:noFill/>
+          <a:ln/>
+        </p:spPr>
+        <p:txBody>
+          <a:bodyPr wrap="square" lIns="0" tIns="0" rIns="0" bIns="0" rtlCol="0" anchor="ctr"/>
+          <a:lstStyle/>
+          <a:p>
+            <a:pPr algn="ctr" indent="0" marL="0">
+              <a:buNone/>
+            </a:pPr>
+            <a:r>
+              <a:rPr lang="en-US" sz="1800" b="1" dirty="0">
+                <a:solidFill>
+                  <a:srgbClr val="FFFFFF"/>
+                </a:solidFill>
+                <a:latin typeface="PingFang SC" pitchFamily="34" charset="0"/>
+                <a:ea typeface="PingFang SC" pitchFamily="34" charset="-122"/>
+                <a:cs typeface="PingFang SC" pitchFamily="34" charset="-120"/>
+              </a:rPr>
+              <a:t>⑦</a:t>
+            </a:r>
+            <a:endParaRPr lang="en-US" sz="1800" dirty="0"/>
+          </a:p>
+        </p:txBody>
+      </p:sp>
+      <p:sp>
+        <p:nvSpPr>
+          <p:cNvPr id="4" name="Text 2"/>
+          <p:cNvSpPr/>
+          <p:nvPr/>
+        </p:nvSpPr>
+        <p:spPr>
+          <a:xfrm>
+            <a:off x="1325880" y="384048"/>
+            <a:ext cx="6400800" cy="713232"/>
+          </a:xfrm>
+          <a:prstGeom prst="rect">
+            <a:avLst/>
+          </a:prstGeom>
+          <a:noFill/>
+          <a:ln/>
+        </p:spPr>
+        <p:txBody>
+          <a:bodyPr wrap="square" lIns="0" tIns="0" rIns="0" bIns="0" rtlCol="0" anchor="ctr"/>
+          <a:lstStyle/>
+          <a:p>
+            <a:pPr indent="0" marL="0">
+              <a:buNone/>
+            </a:pPr>
+            <a:r>
+              <a:rPr lang="en-US" sz="3000" b="1" dirty="0">
+                <a:solidFill>
+                  <a:srgbClr val="0F172A"/>
+                </a:solidFill>
+                <a:latin typeface="PingFang SC" pitchFamily="34" charset="0"/>
+                <a:ea typeface="PingFang SC" pitchFamily="34" charset="-122"/>
+                <a:cs typeface="PingFang SC" pitchFamily="34" charset="-120"/>
+              </a:rPr>
+              <a:t>端云协同 · 千人千面冷热识别</a:t>
+            </a:r>
+            <a:endParaRPr lang="en-US" sz="3000" dirty="0"/>
+          </a:p>
+        </p:txBody>
+      </p:sp>
+      <p:sp>
+        <p:nvSpPr>
+          <p:cNvPr id="5" name="Shape 3"/>
+          <p:cNvSpPr/>
+          <p:nvPr/>
+        </p:nvSpPr>
+        <p:spPr>
+          <a:xfrm>
+            <a:off x="8001000" y="557784"/>
+            <a:ext cx="3611880" cy="365760"/>
+          </a:xfrm>
+          <a:prstGeom prst="roundRect">
+            <a:avLst>
+              <a:gd name="adj" fmla="val 50000"/>
+            </a:avLst>
+          </a:prstGeom>
+          <a:solidFill>
+            <a:srgbClr val="FFFFFF"/>
+          </a:solidFill>
+          <a:ln w="12700">
+            <a:solidFill>
+              <a:srgbClr val="7C3AED"/>
+            </a:solidFill>
+            <a:prstDash val="solid"/>
+          </a:ln>
+        </p:spPr>
+      </p:sp>
+      <p:sp>
+        <p:nvSpPr>
+          <p:cNvPr id="6" name="Text 4"/>
+          <p:cNvSpPr/>
+          <p:nvPr/>
+        </p:nvSpPr>
+        <p:spPr>
+          <a:xfrm>
+            <a:off x="8092440" y="557784"/>
+            <a:ext cx="3429000" cy="365760"/>
+          </a:xfrm>
+          <a:prstGeom prst="rect">
+            <a:avLst/>
+          </a:prstGeom>
+          <a:noFill/>
+          <a:ln/>
+        </p:spPr>
+        <p:txBody>
+          <a:bodyPr wrap="square" lIns="0" tIns="0" rIns="0" bIns="0" rtlCol="0" anchor="ctr"/>
+          <a:lstStyle/>
+          <a:p>
+            <a:pPr algn="ctr" indent="0" marL="0">
+              <a:buNone/>
+            </a:pPr>
+            <a:r>
+              <a:rPr lang="en-US" sz="1100" b="1" dirty="0">
+                <a:solidFill>
+                  <a:srgbClr val="7C3AED"/>
+                </a:solidFill>
+                <a:latin typeface="PingFang SC" pitchFamily="34" charset="0"/>
+                <a:ea typeface="PingFang SC" pitchFamily="34" charset="-122"/>
+                <a:cs typeface="PingFang SC" pitchFamily="34" charset="-120"/>
+              </a:rPr>
+              <a:t>模块：云侧大脑 ↔ 端侧全栈</a:t>
+            </a:r>
+            <a:endParaRPr lang="en-US" sz="1100" dirty="0"/>
+          </a:p>
+        </p:txBody>
+      </p:sp>
+      <p:sp>
+        <p:nvSpPr>
+          <p:cNvPr id="7" name="Shape 5"/>
+          <p:cNvSpPr/>
+          <p:nvPr/>
+        </p:nvSpPr>
+        <p:spPr>
+          <a:xfrm>
+            <a:off x="548640" y="1417320"/>
+            <a:ext cx="5486400" cy="2788920"/>
+          </a:xfrm>
+          <a:prstGeom prst="roundRect">
+            <a:avLst>
+              <a:gd name="adj" fmla="val 3934"/>
+            </a:avLst>
+          </a:prstGeom>
+          <a:solidFill>
+            <a:srgbClr val="FEF2F2"/>
+          </a:solidFill>
+          <a:ln w="12700">
+            <a:solidFill>
+              <a:srgbClr val="FECACA"/>
+            </a:solidFill>
+            <a:prstDash val="solid"/>
+          </a:ln>
+          <a:effectLst>
+            <a:outerShdw sx="100000" sy="100000" kx="0" ky="0" algn="bl" rotWithShape="0" blurRad="101600" dist="38100" dir="5400000">
+              <a:srgbClr val="000000">
+                <a:alpha val="12000"/>
+              </a:srgbClr>
+            </a:outerShdw>
+          </a:effectLst>
+        </p:spPr>
+      </p:sp>
+      <p:sp>
+        <p:nvSpPr>
+          <p:cNvPr id="8" name="Text 6"/>
+          <p:cNvSpPr/>
+          <p:nvPr/>
+        </p:nvSpPr>
+        <p:spPr>
+          <a:xfrm>
+            <a:off x="822960" y="1600200"/>
+            <a:ext cx="4937760" cy="457200"/>
+          </a:xfrm>
+          <a:prstGeom prst="rect">
+            <a:avLst/>
+          </a:prstGeom>
+          <a:noFill/>
+          <a:ln/>
+        </p:spPr>
+        <p:txBody>
+          <a:bodyPr wrap="square" lIns="0" tIns="0" rIns="0" bIns="0" rtlCol="0" anchor="ctr"/>
+          <a:lstStyle/>
+          <a:p>
+            <a:pPr indent="0" marL="0">
+              <a:buNone/>
+            </a:pPr>
+            <a:r>
+              <a:rPr lang="en-US" sz="1800" b="1" dirty="0">
+                <a:solidFill>
+                  <a:srgbClr val="B91C1C"/>
+                </a:solidFill>
+                <a:latin typeface="PingFang SC" pitchFamily="34" charset="0"/>
+                <a:ea typeface="PingFang SC" pitchFamily="34" charset="-122"/>
+                <a:cs typeface="PingFang SC" pitchFamily="34" charset="-120"/>
+              </a:rPr>
+              <a:t>面临的问题</a:t>
+            </a:r>
+            <a:endParaRPr lang="en-US" sz="1800" dirty="0"/>
+          </a:p>
+        </p:txBody>
+      </p:sp>
+      <p:sp>
+        <p:nvSpPr>
+          <p:cNvPr id="9" name="Text 7"/>
+          <p:cNvSpPr/>
+          <p:nvPr/>
+        </p:nvSpPr>
+        <p:spPr>
+          <a:xfrm>
+            <a:off x="868680" y="2148840"/>
+            <a:ext cx="4892040" cy="1920240"/>
+          </a:xfrm>
+          <a:prstGeom prst="rect">
+            <a:avLst/>
+          </a:prstGeom>
+          <a:noFill/>
+          <a:ln/>
+        </p:spPr>
+        <p:txBody>
+          <a:bodyPr wrap="square" rtlCol="0" anchor="t"/>
+          <a:lstStyle/>
+          <a:p>
+            <a:pPr marL="342900" indent="-342900">
+              <a:lnSpc>
+                <a:spcPct val="105000"/>
+              </a:lnSpc>
+              <a:spcAft>
+                <a:spcPts val="1000"/>
+              </a:spcAft>
+              <a:buSzPct val="100000"/>
+              <a:buChar char="•"/>
+            </a:pPr>
+            <a:r>
+              <a:rPr lang="en-US" sz="1450" dirty="0">
+                <a:solidFill>
+                  <a:srgbClr val="334155"/>
+                </a:solidFill>
+                <a:latin typeface="PingFang SC" pitchFamily="34" charset="0"/>
+                <a:ea typeface="PingFang SC" pitchFamily="34" charset="-122"/>
+                <a:cs typeface="PingFang SC" pitchFamily="34" charset="-120"/>
+              </a:rPr>
+              <a:t>本地通用冷热策略一刀切，对每个用户 / 场景预测错（86.6% GB 冷启动 &gt;1 s）</a:t>
+            </a:r>
+            <a:endParaRPr lang="en-US" sz="1450" dirty="0"/>
+          </a:p>
+          <a:p>
+            <a:pPr marL="342900" indent="-342900">
+              <a:lnSpc>
+                <a:spcPct val="105000"/>
+              </a:lnSpc>
+              <a:spcAft>
+                <a:spcPts val="1000"/>
+              </a:spcAft>
+              <a:buSzPct val="100000"/>
+              <a:buChar char="•"/>
+            </a:pPr>
+            <a:r>
+              <a:rPr lang="en-US" sz="1450" dirty="0">
+                <a:solidFill>
+                  <a:srgbClr val="334155"/>
+                </a:solidFill>
+                <a:latin typeface="PingFang SC" pitchFamily="34" charset="0"/>
+                <a:ea typeface="PingFang SC" pitchFamily="34" charset="-122"/>
+                <a:cs typeface="PingFang SC" pitchFamily="34" charset="-120"/>
+              </a:rPr>
+              <a:t>端侧学习器数据 / 算力 / 标签不足，独立学不出强个性化预测器</a:t>
+            </a:r>
+            <a:endParaRPr lang="en-US" sz="1450" dirty="0"/>
+          </a:p>
+        </p:txBody>
+      </p:sp>
+      <p:sp>
+        <p:nvSpPr>
+          <p:cNvPr id="10" name="Shape 8"/>
+          <p:cNvSpPr/>
+          <p:nvPr/>
+        </p:nvSpPr>
+        <p:spPr>
+          <a:xfrm>
+            <a:off x="6172200" y="1417320"/>
+            <a:ext cx="5486400" cy="2788920"/>
+          </a:xfrm>
+          <a:prstGeom prst="roundRect">
+            <a:avLst>
+              <a:gd name="adj" fmla="val 3934"/>
+            </a:avLst>
+          </a:prstGeom>
+          <a:solidFill>
+            <a:srgbClr val="ECFDF5"/>
+          </a:solidFill>
+          <a:ln w="12700">
+            <a:solidFill>
+              <a:srgbClr val="A7F3D0"/>
+            </a:solidFill>
+            <a:prstDash val="solid"/>
+          </a:ln>
+          <a:effectLst>
+            <a:outerShdw sx="100000" sy="100000" kx="0" ky="0" algn="bl" rotWithShape="0" blurRad="101600" dist="38100" dir="5400000">
+              <a:srgbClr val="000000">
+                <a:alpha val="12000"/>
+              </a:srgbClr>
+            </a:outerShdw>
+          </a:effectLst>
+        </p:spPr>
+      </p:sp>
+      <p:sp>
+        <p:nvSpPr>
+          <p:cNvPr id="11" name="Text 9"/>
+          <p:cNvSpPr/>
+          <p:nvPr/>
+        </p:nvSpPr>
+        <p:spPr>
+          <a:xfrm>
+            <a:off x="6446520" y="1600200"/>
+            <a:ext cx="4937760" cy="457200"/>
+          </a:xfrm>
+          <a:prstGeom prst="rect">
+            <a:avLst/>
+          </a:prstGeom>
+          <a:noFill/>
+          <a:ln/>
+        </p:spPr>
+        <p:txBody>
+          <a:bodyPr wrap="square" lIns="0" tIns="0" rIns="0" bIns="0" rtlCol="0" anchor="ctr"/>
+          <a:lstStyle/>
+          <a:p>
+            <a:pPr indent="0" marL="0">
+              <a:buNone/>
+            </a:pPr>
+            <a:r>
+              <a:rPr lang="en-US" sz="1800" b="1" dirty="0">
+                <a:solidFill>
+                  <a:srgbClr val="0F766E"/>
+                </a:solidFill>
+                <a:latin typeface="PingFang SC" pitchFamily="34" charset="0"/>
+                <a:ea typeface="PingFang SC" pitchFamily="34" charset="-122"/>
+                <a:cs typeface="PingFang SC" pitchFamily="34" charset="-120"/>
+              </a:rPr>
+              <a:t>我们的洞察怎么解</a:t>
+            </a:r>
+            <a:endParaRPr lang="en-US" sz="1800" dirty="0"/>
+          </a:p>
+        </p:txBody>
+      </p:sp>
+      <p:sp>
+        <p:nvSpPr>
+          <p:cNvPr id="12" name="Text 10"/>
+          <p:cNvSpPr/>
+          <p:nvPr/>
+        </p:nvSpPr>
+        <p:spPr>
+          <a:xfrm>
+            <a:off x="6492240" y="2148840"/>
+            <a:ext cx="4892040" cy="1920240"/>
+          </a:xfrm>
+          <a:prstGeom prst="rect">
+            <a:avLst/>
+          </a:prstGeom>
+          <a:noFill/>
+          <a:ln/>
+        </p:spPr>
+        <p:txBody>
+          <a:bodyPr wrap="square" rtlCol="0" anchor="t"/>
+          <a:lstStyle/>
+          <a:p>
+            <a:pPr marL="342900" indent="-342900">
+              <a:lnSpc>
+                <a:spcPct val="105000"/>
+              </a:lnSpc>
+              <a:spcAft>
+                <a:spcPts val="1000"/>
+              </a:spcAft>
+              <a:buSzPct val="100000"/>
+              <a:buChar char="•"/>
+            </a:pPr>
+            <a:r>
+              <a:rPr lang="en-US" sz="1450" dirty="0">
+                <a:solidFill>
+                  <a:srgbClr val="334155"/>
+                </a:solidFill>
+                <a:latin typeface="PingFang SC" pitchFamily="34" charset="0"/>
+                <a:ea typeface="PingFang SC" pitchFamily="34" charset="-122"/>
+                <a:cs typeface="PingFang SC" pitchFamily="34" charset="-120"/>
+              </a:rPr>
+              <a:t>端侧「小脑」个性化预测 + 云侧「大脑」聚合并下发千人千面策略</a:t>
+            </a:r>
+            <a:endParaRPr lang="en-US" sz="1450" dirty="0"/>
+          </a:p>
+          <a:p>
+            <a:pPr marL="342900" indent="-342900">
+              <a:lnSpc>
+                <a:spcPct val="105000"/>
+              </a:lnSpc>
+              <a:spcAft>
+                <a:spcPts val="1000"/>
+              </a:spcAft>
+              <a:buSzPct val="100000"/>
+              <a:buChar char="•"/>
+            </a:pPr>
+            <a:r>
+              <a:rPr lang="en-US" sz="1450" dirty="0">
+                <a:solidFill>
+                  <a:srgbClr val="334155"/>
+                </a:solidFill>
+                <a:latin typeface="PingFang SC" pitchFamily="34" charset="0"/>
+                <a:ea typeface="PingFang SC" pitchFamily="34" charset="-122"/>
+                <a:cs typeface="PingFang SC" pitchFamily="34" charset="-120"/>
+              </a:rPr>
+              <a:t>智能请求门控：仅约 5% 调云，原始行为留本地</a:t>
+            </a:r>
+            <a:endParaRPr lang="en-US" sz="1450" dirty="0"/>
+          </a:p>
+        </p:txBody>
+      </p:sp>
+      <p:sp>
+        <p:nvSpPr>
+          <p:cNvPr id="13" name="Shape 11"/>
+          <p:cNvSpPr/>
+          <p:nvPr/>
+        </p:nvSpPr>
+        <p:spPr>
+          <a:xfrm>
+            <a:off x="6172200" y="4434840"/>
+            <a:ext cx="2583180" cy="1417320"/>
+          </a:xfrm>
+          <a:prstGeom prst="roundRect">
+            <a:avLst>
+              <a:gd name="adj" fmla="val 6452"/>
+            </a:avLst>
+          </a:prstGeom>
+          <a:solidFill>
+            <a:srgbClr val="7C3AED"/>
+          </a:solidFill>
+          <a:ln w="12700">
+            <a:solidFill>
+              <a:srgbClr val="7C3AED"/>
+            </a:solidFill>
+            <a:prstDash val="solid"/>
+          </a:ln>
+          <a:effectLst>
+            <a:outerShdw sx="100000" sy="100000" kx="0" ky="0" algn="bl" rotWithShape="0" blurRad="101600" dist="38100" dir="5400000">
+              <a:srgbClr val="000000">
+                <a:alpha val="12000"/>
+              </a:srgbClr>
+            </a:outerShdw>
+          </a:effectLst>
+        </p:spPr>
+      </p:sp>
+      <p:sp>
+        <p:nvSpPr>
+          <p:cNvPr id="14" name="Text 12"/>
+          <p:cNvSpPr/>
+          <p:nvPr/>
+        </p:nvSpPr>
+        <p:spPr>
+          <a:xfrm>
+            <a:off x="6172200" y="4572000"/>
+            <a:ext cx="2583180" cy="685800"/>
+          </a:xfrm>
+          <a:prstGeom prst="rect">
+            <a:avLst/>
+          </a:prstGeom>
+          <a:noFill/>
+          <a:ln/>
+        </p:spPr>
+        <p:txBody>
+          <a:bodyPr wrap="square" lIns="0" tIns="0" rIns="0" bIns="0" rtlCol="0" anchor="ctr"/>
+          <a:lstStyle/>
+          <a:p>
+            <a:pPr algn="ctr" indent="0" marL="0">
+              <a:buNone/>
+            </a:pPr>
+            <a:r>
+              <a:rPr lang="en-US" sz="3000" b="1" dirty="0">
+                <a:solidFill>
+                  <a:srgbClr val="FFFFFF"/>
+                </a:solidFill>
+                <a:latin typeface="PingFang SC" pitchFamily="34" charset="0"/>
+                <a:ea typeface="PingFang SC" pitchFamily="34" charset="-122"/>
+                <a:cs typeface="PingFang SC" pitchFamily="34" charset="-120"/>
+              </a:rPr>
+              <a:t>仅 5%</a:t>
+            </a:r>
+            <a:endParaRPr lang="en-US" sz="3000" dirty="0"/>
+          </a:p>
+        </p:txBody>
+      </p:sp>
+      <p:sp>
+        <p:nvSpPr>
+          <p:cNvPr id="15" name="Text 13"/>
+          <p:cNvSpPr/>
+          <p:nvPr/>
+        </p:nvSpPr>
+        <p:spPr>
+          <a:xfrm>
+            <a:off x="6263640" y="5285232"/>
+            <a:ext cx="2400300" cy="457200"/>
+          </a:xfrm>
+          <a:prstGeom prst="rect">
+            <a:avLst/>
+          </a:prstGeom>
+          <a:noFill/>
+          <a:ln/>
+        </p:spPr>
+        <p:txBody>
+          <a:bodyPr wrap="square" lIns="0" tIns="0" rIns="0" bIns="0" rtlCol="0" anchor="ctr"/>
+          <a:lstStyle/>
+          <a:p>
+            <a:pPr algn="ctr" indent="0" marL="0">
+              <a:buNone/>
+            </a:pPr>
+            <a:r>
+              <a:rPr lang="en-US" sz="1200" dirty="0">
+                <a:solidFill>
+                  <a:srgbClr val="F1F5F9"/>
+                </a:solidFill>
+                <a:latin typeface="PingFang SC" pitchFamily="34" charset="0"/>
+                <a:ea typeface="PingFang SC" pitchFamily="34" charset="-122"/>
+                <a:cs typeface="PingFang SC" pitchFamily="34" charset="-120"/>
+              </a:rPr>
+              <a:t>云端调用频率</a:t>
+            </a:r>
+            <a:endParaRPr lang="en-US" sz="1200" dirty="0"/>
+          </a:p>
+        </p:txBody>
+      </p:sp>
+      <p:sp>
+        <p:nvSpPr>
+          <p:cNvPr id="16" name="Shape 14"/>
+          <p:cNvSpPr/>
+          <p:nvPr/>
+        </p:nvSpPr>
+        <p:spPr>
+          <a:xfrm>
+            <a:off x="9075420" y="4434840"/>
+            <a:ext cx="2583180" cy="1417320"/>
+          </a:xfrm>
+          <a:prstGeom prst="roundRect">
+            <a:avLst>
+              <a:gd name="adj" fmla="val 6452"/>
+            </a:avLst>
+          </a:prstGeom>
+          <a:solidFill>
+            <a:srgbClr val="7C3AED"/>
+          </a:solidFill>
+          <a:ln w="12700">
+            <a:solidFill>
+              <a:srgbClr val="7C3AED"/>
+            </a:solidFill>
+            <a:prstDash val="solid"/>
+          </a:ln>
+          <a:effectLst>
+            <a:outerShdw sx="100000" sy="100000" kx="0" ky="0" algn="bl" rotWithShape="0" blurRad="101600" dist="38100" dir="5400000">
+              <a:srgbClr val="000000">
+                <a:alpha val="12000"/>
+              </a:srgbClr>
+            </a:outerShdw>
+          </a:effectLst>
+        </p:spPr>
+      </p:sp>
+      <p:sp>
+        <p:nvSpPr>
+          <p:cNvPr id="17" name="Text 15"/>
+          <p:cNvSpPr/>
+          <p:nvPr/>
+        </p:nvSpPr>
+        <p:spPr>
+          <a:xfrm>
+            <a:off x="9075420" y="4572000"/>
+            <a:ext cx="2583180" cy="685800"/>
+          </a:xfrm>
+          <a:prstGeom prst="rect">
+            <a:avLst/>
+          </a:prstGeom>
+          <a:noFill/>
+          <a:ln/>
+        </p:spPr>
+        <p:txBody>
+          <a:bodyPr wrap="square" lIns="0" tIns="0" rIns="0" bIns="0" rtlCol="0" anchor="ctr"/>
+          <a:lstStyle/>
+          <a:p>
+            <a:pPr algn="ctr" indent="0" marL="0">
+              <a:buNone/>
+            </a:pPr>
+            <a:r>
+              <a:rPr lang="en-US" sz="3000" b="1" dirty="0">
+                <a:solidFill>
+                  <a:srgbClr val="FFFFFF"/>
+                </a:solidFill>
+                <a:latin typeface="PingFang SC" pitchFamily="34" charset="0"/>
+                <a:ea typeface="PingFang SC" pitchFamily="34" charset="-122"/>
+                <a:cs typeface="PingFang SC" pitchFamily="34" charset="-120"/>
+              </a:rPr>
+              <a:t>+3.5~41%</a:t>
+            </a:r>
+            <a:endParaRPr lang="en-US" sz="3000" dirty="0"/>
+          </a:p>
+        </p:txBody>
+      </p:sp>
+      <p:sp>
+        <p:nvSpPr>
+          <p:cNvPr id="18" name="Text 16"/>
+          <p:cNvSpPr/>
+          <p:nvPr/>
+        </p:nvSpPr>
+        <p:spPr>
+          <a:xfrm>
+            <a:off x="9166860" y="5285232"/>
+            <a:ext cx="2400300" cy="457200"/>
+          </a:xfrm>
+          <a:prstGeom prst="rect">
+            <a:avLst/>
+          </a:prstGeom>
+          <a:noFill/>
+          <a:ln/>
+        </p:spPr>
+        <p:txBody>
+          <a:bodyPr wrap="square" lIns="0" tIns="0" rIns="0" bIns="0" rtlCol="0" anchor="ctr"/>
+          <a:lstStyle/>
+          <a:p>
+            <a:pPr algn="ctr" indent="0" marL="0">
+              <a:buNone/>
+            </a:pPr>
+            <a:r>
+              <a:rPr lang="en-US" sz="1200" dirty="0">
+                <a:solidFill>
+                  <a:srgbClr val="F1F5F9"/>
+                </a:solidFill>
+                <a:latin typeface="PingFang SC" pitchFamily="34" charset="0"/>
+                <a:ea typeface="PingFang SC" pitchFamily="34" charset="-122"/>
+                <a:cs typeface="PingFang SC" pitchFamily="34" charset="-120"/>
+              </a:rPr>
+              <a:t>个性化精度增益</a:t>
+            </a:r>
+            <a:endParaRPr lang="en-US" sz="1200" dirty="0"/>
+          </a:p>
+        </p:txBody>
+      </p:sp>
+      <p:sp>
+        <p:nvSpPr>
+          <p:cNvPr id="19" name="Shape 17"/>
+          <p:cNvSpPr/>
+          <p:nvPr/>
+        </p:nvSpPr>
+        <p:spPr>
+          <a:xfrm>
+            <a:off x="548640" y="4434840"/>
+            <a:ext cx="5486400" cy="1417320"/>
+          </a:xfrm>
+          <a:prstGeom prst="roundRect">
+            <a:avLst>
+              <a:gd name="adj" fmla="val 6452"/>
+            </a:avLst>
+          </a:prstGeom>
+          <a:solidFill>
+            <a:srgbClr val="F8FAFC"/>
+          </a:solidFill>
+          <a:ln w="12700">
+            <a:solidFill>
+              <a:srgbClr val="E2E8F0"/>
+            </a:solidFill>
+            <a:prstDash val="solid"/>
+          </a:ln>
+        </p:spPr>
+      </p:sp>
+      <p:sp>
+        <p:nvSpPr>
+          <p:cNvPr id="20" name="Text 18"/>
+          <p:cNvSpPr/>
+          <p:nvPr/>
+        </p:nvSpPr>
+        <p:spPr>
+          <a:xfrm>
+            <a:off x="777240" y="4553712"/>
+            <a:ext cx="5029200" cy="365760"/>
+          </a:xfrm>
+          <a:prstGeom prst="rect">
+            <a:avLst/>
+          </a:prstGeom>
+          <a:noFill/>
+          <a:ln/>
+        </p:spPr>
+        <p:txBody>
+          <a:bodyPr wrap="square" lIns="0" tIns="0" rIns="0" bIns="0" rtlCol="0" anchor="ctr"/>
+          <a:lstStyle/>
+          <a:p>
+            <a:pPr indent="0" marL="0">
+              <a:buNone/>
+            </a:pPr>
+            <a:r>
+              <a:rPr lang="en-US" sz="1250" b="1" dirty="0">
+                <a:solidFill>
+                  <a:srgbClr val="7C3AED"/>
+                </a:solidFill>
+                <a:latin typeface="PingFang SC" pitchFamily="34" charset="0"/>
+                <a:ea typeface="PingFang SC" pitchFamily="34" charset="-122"/>
+                <a:cs typeface="PingFang SC" pitchFamily="34" charset="-120"/>
+              </a:rPr>
+              <a:t>一句话</a:t>
+            </a:r>
+            <a:endParaRPr lang="en-US" sz="1250" dirty="0"/>
+          </a:p>
+        </p:txBody>
+      </p:sp>
+      <p:sp>
+        <p:nvSpPr>
+          <p:cNvPr id="21" name="Text 19"/>
+          <p:cNvSpPr/>
+          <p:nvPr/>
+        </p:nvSpPr>
+        <p:spPr>
+          <a:xfrm>
+            <a:off x="777240" y="4892040"/>
+            <a:ext cx="5029200" cy="868680"/>
+          </a:xfrm>
+          <a:prstGeom prst="rect">
+            <a:avLst/>
+          </a:prstGeom>
+          <a:noFill/>
+          <a:ln/>
+        </p:spPr>
+        <p:txBody>
+          <a:bodyPr wrap="square" lIns="0" tIns="0" rIns="0" bIns="0" rtlCol="0" anchor="t"/>
+          <a:lstStyle/>
+          <a:p>
+            <a:pPr indent="0" marL="0">
+              <a:buNone/>
+            </a:pPr>
+            <a:r>
+              <a:rPr lang="en-US" sz="1300" dirty="0">
+                <a:solidFill>
+                  <a:srgbClr val="334155"/>
+                </a:solidFill>
+                <a:latin typeface="PingFang SC" pitchFamily="34" charset="0"/>
+                <a:ea typeface="PingFang SC" pitchFamily="34" charset="-122"/>
+                <a:cs typeface="PingFang SC" pitchFamily="34" charset="-120"/>
+              </a:rPr>
+              <a:t>端云协同 · 千人千面冷热识别：把「本地通用冷热策略一刀切」从问题变成可治理的设计点。</a:t>
+            </a:r>
+            <a:endParaRPr lang="en-US" sz="1300" dirty="0"/>
+          </a:p>
+        </p:txBody>
+      </p:sp>
+      <p:sp>
+        <p:nvSpPr>
+          <p:cNvPr id="22" name="Text 20"/>
+          <p:cNvSpPr/>
+          <p:nvPr/>
+        </p:nvSpPr>
+        <p:spPr>
+          <a:xfrm>
+            <a:off x="548640" y="6355080"/>
+            <a:ext cx="5486400" cy="274320"/>
+          </a:xfrm>
+          <a:prstGeom prst="rect">
+            <a:avLst/>
+          </a:prstGeom>
+          <a:noFill/>
+          <a:ln/>
+        </p:spPr>
+        <p:txBody>
+          <a:bodyPr wrap="square" lIns="0" tIns="0" rIns="0" bIns="0" rtlCol="0" anchor="ctr"/>
+          <a:lstStyle/>
+          <a:p>
+            <a:pPr indent="0" marL="0">
+              <a:buNone/>
+            </a:pPr>
+            <a:r>
+              <a:rPr lang="en-US" sz="1000" dirty="0">
+                <a:solidFill>
+                  <a:srgbClr val="64748B"/>
+                </a:solidFill>
+                <a:latin typeface="PingFang SC" pitchFamily="34" charset="0"/>
+                <a:ea typeface="PingFang SC" pitchFamily="34" charset="-122"/>
+                <a:cs typeface="PingFang SC" pitchFamily="34" charset="-120"/>
+              </a:rPr>
+              <a:t>N+1 · 洞察 7 / 7</a:t>
+            </a:r>
+            <a:endParaRPr lang="en-US" sz="1000" dirty="0"/>
+          </a:p>
+        </p:txBody>
+      </p:sp>
+    </p:spTree>
+  </p:cSld>
+  <p:clrMapOvr>
+    <a:masterClrMapping/>
+  </p:clrMapOvr>
+</p:sld>
+</file>
+
+<file path=ppt/slides/slide11.xml><?xml version="1.0" encoding="utf-8"?>
+<p:sld xmlns:a="http://schemas.openxmlformats.org/drawingml/2006/main" xmlns:r="http://schemas.openxmlformats.org/officeDocument/2006/relationships" xmlns:p="http://schemas.openxmlformats.org/presentationml/2006/main">
+  <p:cSld name="Slide 11">
+    <p:bg>
+      <p:bgPr>
+        <a:solidFill>
           <a:srgbClr val="0F172A"/>
         </a:solidFill>
       </p:bgPr>
@@ -3355,39 +4299,77 @@
       </p:grpSpPr>
       <p:sp>
         <p:nvSpPr>
-          <p:cNvPr id="2" name="Shape 0"/>
-          <p:cNvSpPr/>
-          <p:nvPr/>
-        </p:nvSpPr>
-        <p:spPr>
-          <a:xfrm>
-            <a:off x="548640" y="411480"/>
-            <a:ext cx="640080" cy="640080"/>
-          </a:xfrm>
-          <a:prstGeom prst="ellipse">
-            <a:avLst/>
-          </a:prstGeom>
-          <a:solidFill>
-            <a:srgbClr val="2563EB"/>
-          </a:solidFill>
-          <a:ln w="12700">
-            <a:solidFill>
-              <a:srgbClr val="2563EB"/>
-            </a:solidFill>
-            <a:prstDash val="solid"/>
-          </a:ln>
-        </p:spPr>
-      </p:sp>
-      <p:sp>
-        <p:nvSpPr>
-          <p:cNvPr id="3" name="Text 1"/>
-          <p:cNvSpPr/>
-          <p:nvPr/>
-        </p:nvSpPr>
-        <p:spPr>
-          <a:xfrm>
-            <a:off x="548640" y="411480"/>
-            <a:ext cx="640080" cy="640080"/>
+          <p:cNvPr id="2" name="Text 0"/>
+          <p:cNvSpPr/>
+          <p:nvPr/>
+        </p:nvSpPr>
+        <p:spPr>
+          <a:xfrm>
+            <a:off x="457200" y="237744"/>
+            <a:ext cx="11247120" cy="530352"/>
+          </a:xfrm>
+          <a:prstGeom prst="rect">
+            <a:avLst/>
+          </a:prstGeom>
+          <a:noFill/>
+          <a:ln/>
+        </p:spPr>
+        <p:txBody>
+          <a:bodyPr wrap="square" lIns="0" tIns="0" rIns="0" bIns="0" rtlCol="0" anchor="ctr"/>
+          <a:lstStyle/>
+          <a:p>
+            <a:pPr indent="0" marL="0">
+              <a:buNone/>
+            </a:pPr>
+            <a:r>
+              <a:rPr lang="en-US" sz="2500" b="1" dirty="0">
+                <a:solidFill>
+                  <a:srgbClr val="0F172A"/>
+                </a:solidFill>
+                <a:latin typeface="PingFang SC" pitchFamily="34" charset="0"/>
+                <a:ea typeface="PingFang SC" pitchFamily="34" charset="-122"/>
+                <a:cs typeface="PingFang SC" pitchFamily="34" charset="-120"/>
+              </a:rPr>
+              <a:t>分层架构：耦合负载 → Agent OS → 传统 OS 内存管理 → 片上互联</a:t>
+            </a:r>
+            <a:endParaRPr lang="en-US" sz="2500" dirty="0"/>
+          </a:p>
+        </p:txBody>
+      </p:sp>
+      <p:pic>
+        <p:nvPicPr>
+          <p:cNvPr id="3" name="Image 0" descr="/private/tmp/claude-501/-Users-markov-m4-Projects-memory-insight/677a9d82-cf2b-4b33-bafa-75de8844fc75/scratchpad/pptbuild/stackfull-1.png">    </p:cNvPr>
+          <p:cNvPicPr>
+            <a:picLocks noChangeAspect="1"/>
+          </p:cNvPicPr>
+          <p:nvPr/>
+        </p:nvPicPr>
+        <p:blipFill>
+          <a:blip r:embed="rId1"/>
+          <a:stretch>
+            <a:fillRect/>
+          </a:stretch>
+        </p:blipFill>
+        <p:spPr>
+          <a:xfrm>
+            <a:off x="2455582" y="868680"/>
+            <a:ext cx="7280531" cy="5349240"/>
+          </a:xfrm>
+          <a:prstGeom prst="rect">
+            <a:avLst/>
+          </a:prstGeom>
+        </p:spPr>
+      </p:pic>
+      <p:sp>
+        <p:nvSpPr>
+          <p:cNvPr id="4" name="Text 1"/>
+          <p:cNvSpPr/>
+          <p:nvPr/>
+        </p:nvSpPr>
+        <p:spPr>
+          <a:xfrm>
+            <a:off x="548640" y="6236208"/>
+            <a:ext cx="11064240" cy="457200"/>
           </a:xfrm>
           <a:prstGeom prst="rect">
             <a:avLst/>
@@ -3403,776 +4385,17 @@
               <a:buNone/>
             </a:pPr>
             <a:r>
-              <a:rPr lang="en-US" sz="1800" b="1" dirty="0">
-                <a:solidFill>
-                  <a:srgbClr val="FFFFFF"/>
-                </a:solidFill>
-                <a:latin typeface="PingFang SC" pitchFamily="34" charset="0"/>
-                <a:ea typeface="PingFang SC" pitchFamily="34" charset="-122"/>
-                <a:cs typeface="PingFang SC" pitchFamily="34" charset="-120"/>
-              </a:rPr>
-              <a:t>①</a:t>
-            </a:r>
-            <a:endParaRPr lang="en-US" sz="1800" dirty="0"/>
-          </a:p>
-        </p:txBody>
-      </p:sp>
-      <p:sp>
-        <p:nvSpPr>
-          <p:cNvPr id="4" name="Text 2"/>
-          <p:cNvSpPr/>
-          <p:nvPr/>
-        </p:nvSpPr>
-        <p:spPr>
-          <a:xfrm>
-            <a:off x="1325880" y="384048"/>
-            <a:ext cx="6400800" cy="713232"/>
-          </a:xfrm>
-          <a:prstGeom prst="rect">
-            <a:avLst/>
-          </a:prstGeom>
-          <a:noFill/>
-          <a:ln/>
-        </p:spPr>
-        <p:txBody>
-          <a:bodyPr wrap="square" lIns="0" tIns="0" rIns="0" bIns="0" rtlCol="0" anchor="ctr"/>
-          <a:lstStyle/>
-          <a:p>
-            <a:pPr indent="0" marL="0">
-              <a:buNone/>
-            </a:pPr>
-            <a:r>
-              <a:rPr lang="en-US" sz="3000" b="1" dirty="0">
-                <a:solidFill>
-                  <a:srgbClr val="0F172A"/>
-                </a:solidFill>
-                <a:latin typeface="PingFang SC" pitchFamily="34" charset="0"/>
-                <a:ea typeface="PingFang SC" pitchFamily="34" charset="-122"/>
-                <a:cs typeface="PingFang SC" pitchFamily="34" charset="-120"/>
-              </a:rPr>
-              <a:t>KV Cache 分级管理</a:t>
-            </a:r>
-            <a:endParaRPr lang="en-US" sz="3000" dirty="0"/>
-          </a:p>
-        </p:txBody>
-      </p:sp>
-      <p:sp>
-        <p:nvSpPr>
-          <p:cNvPr id="5" name="Shape 3"/>
-          <p:cNvSpPr/>
-          <p:nvPr/>
-        </p:nvSpPr>
-        <p:spPr>
-          <a:xfrm>
-            <a:off x="8001000" y="557784"/>
-            <a:ext cx="3611880" cy="365760"/>
-          </a:xfrm>
-          <a:prstGeom prst="roundRect">
-            <a:avLst>
-              <a:gd name="adj" fmla="val 50000"/>
-            </a:avLst>
-          </a:prstGeom>
-          <a:solidFill>
-            <a:srgbClr val="FFFFFF"/>
-          </a:solidFill>
-          <a:ln w="12700">
-            <a:solidFill>
-              <a:srgbClr val="2563EB"/>
-            </a:solidFill>
-            <a:prstDash val="solid"/>
-          </a:ln>
-        </p:spPr>
-      </p:sp>
-      <p:sp>
-        <p:nvSpPr>
-          <p:cNvPr id="6" name="Text 4"/>
-          <p:cNvSpPr/>
-          <p:nvPr/>
-        </p:nvSpPr>
-        <p:spPr>
-          <a:xfrm>
-            <a:off x="8092440" y="557784"/>
-            <a:ext cx="3429000" cy="365760"/>
-          </a:xfrm>
-          <a:prstGeom prst="rect">
-            <a:avLst/>
-          </a:prstGeom>
-          <a:noFill/>
-          <a:ln/>
-        </p:spPr>
-        <p:txBody>
-          <a:bodyPr wrap="square" lIns="0" tIns="0" rIns="0" bIns="0" rtlCol="0" anchor="ctr"/>
-          <a:lstStyle/>
-          <a:p>
-            <a:pPr algn="ctr" indent="0" marL="0">
-              <a:buNone/>
-            </a:pPr>
-            <a:r>
-              <a:rPr lang="en-US" sz="1100" b="1" dirty="0">
-                <a:solidFill>
-                  <a:srgbClr val="2563EB"/>
-                </a:solidFill>
-                <a:latin typeface="PingFang SC" pitchFamily="34" charset="0"/>
-                <a:ea typeface="PingFang SC" pitchFamily="34" charset="-122"/>
-                <a:cs typeface="PingFang SC" pitchFamily="34" charset="-120"/>
-              </a:rPr>
-              <a:t>模块：应用层 ↔ 存储层</a:t>
+              <a:rPr lang="en-US" sz="1100" i="1" dirty="0">
+                <a:solidFill>
+                  <a:srgbClr val="64748B"/>
+                </a:solidFill>
+                <a:latin typeface="PingFang SC" pitchFamily="34" charset="0"/>
+                <a:ea typeface="PingFang SC" pitchFamily="34" charset="-122"/>
+                <a:cs typeface="PingFang SC" pitchFamily="34" charset="-120"/>
+              </a:rPr>
+              <a:t>自顶向下：未来「前台应用 + 伴随态 AI + 后台长程 Agent」耦合 → 冷热更复杂；AI/Agent 负载先入独立 Agent OS（KV/记忆/冷热治理），下沉到 kernel MM，再落到片上互联（多 IP 竞带宽 + UFS KV 卸载）；传统应用旁路直连内核，安全横切、端云在顶。</a:t>
             </a:r>
             <a:endParaRPr lang="en-US" sz="1100" dirty="0"/>
-          </a:p>
-        </p:txBody>
-      </p:sp>
-      <p:sp>
-        <p:nvSpPr>
-          <p:cNvPr id="7" name="Shape 5"/>
-          <p:cNvSpPr/>
-          <p:nvPr/>
-        </p:nvSpPr>
-        <p:spPr>
-          <a:xfrm>
-            <a:off x="548640" y="1417320"/>
-            <a:ext cx="5486400" cy="2788920"/>
-          </a:xfrm>
-          <a:prstGeom prst="roundRect">
-            <a:avLst>
-              <a:gd name="adj" fmla="val 3934"/>
-            </a:avLst>
-          </a:prstGeom>
-          <a:solidFill>
-            <a:srgbClr val="FEF2F2"/>
-          </a:solidFill>
-          <a:ln w="12700">
-            <a:solidFill>
-              <a:srgbClr val="FECACA"/>
-            </a:solidFill>
-            <a:prstDash val="solid"/>
-          </a:ln>
-          <a:effectLst>
-            <a:outerShdw sx="100000" sy="100000" kx="0" ky="0" algn="bl" rotWithShape="0" blurRad="101600" dist="38100" dir="5400000">
-              <a:srgbClr val="000000">
-                <a:alpha val="12000"/>
-              </a:srgbClr>
-            </a:outerShdw>
-          </a:effectLst>
-        </p:spPr>
-      </p:sp>
-      <p:sp>
-        <p:nvSpPr>
-          <p:cNvPr id="8" name="Text 6"/>
-          <p:cNvSpPr/>
-          <p:nvPr/>
-        </p:nvSpPr>
-        <p:spPr>
-          <a:xfrm>
-            <a:off x="822960" y="1600200"/>
-            <a:ext cx="4937760" cy="457200"/>
-          </a:xfrm>
-          <a:prstGeom prst="rect">
-            <a:avLst/>
-          </a:prstGeom>
-          <a:noFill/>
-          <a:ln/>
-        </p:spPr>
-        <p:txBody>
-          <a:bodyPr wrap="square" lIns="0" tIns="0" rIns="0" bIns="0" rtlCol="0" anchor="ctr"/>
-          <a:lstStyle/>
-          <a:p>
-            <a:pPr indent="0" marL="0">
-              <a:buNone/>
-            </a:pPr>
-            <a:r>
-              <a:rPr lang="en-US" sz="1800" b="1" dirty="0">
-                <a:solidFill>
-                  <a:srgbClr val="B91C1C"/>
-                </a:solidFill>
-                <a:latin typeface="PingFang SC" pitchFamily="34" charset="0"/>
-                <a:ea typeface="PingFang SC" pitchFamily="34" charset="-122"/>
-                <a:cs typeface="PingFang SC" pitchFamily="34" charset="-120"/>
-              </a:rPr>
-              <a:t>面临的问题</a:t>
-            </a:r>
-            <a:endParaRPr lang="en-US" sz="1800" dirty="0"/>
-          </a:p>
-        </p:txBody>
-      </p:sp>
-      <p:sp>
-        <p:nvSpPr>
-          <p:cNvPr id="9" name="Text 7"/>
-          <p:cNvSpPr/>
-          <p:nvPr/>
-        </p:nvSpPr>
-        <p:spPr>
-          <a:xfrm>
-            <a:off x="868680" y="2148840"/>
-            <a:ext cx="4892040" cy="1920240"/>
-          </a:xfrm>
-          <a:prstGeom prst="rect">
-            <a:avLst/>
-          </a:prstGeom>
-          <a:noFill/>
-          <a:ln/>
-        </p:spPr>
-        <p:txBody>
-          <a:bodyPr wrap="square" rtlCol="0" anchor="t"/>
-          <a:lstStyle/>
-          <a:p>
-            <a:pPr marL="342900" indent="-342900">
-              <a:lnSpc>
-                <a:spcPct val="105000"/>
-              </a:lnSpc>
-              <a:spcAft>
-                <a:spcPts val="1000"/>
-              </a:spcAft>
-              <a:buSzPct val="100000"/>
-              <a:buChar char="•"/>
-            </a:pPr>
-            <a:r>
-              <a:rPr lang="en-US" sz="1450" dirty="0">
-                <a:solidFill>
-                  <a:srgbClr val="334155"/>
-                </a:solidFill>
-                <a:latin typeface="PingFang SC" pitchFamily="34" charset="0"/>
-                <a:ea typeface="PingFang SC" pitchFamily="34" charset="-122"/>
-                <a:cs typeface="PingFang SC" pitchFamily="34" charset="-120"/>
-              </a:rPr>
-              <a:t>长上下文 KV Cache 随序列线性膨胀，32K 上下文单请求约 4.3 GB，超出端侧 DRAM</a:t>
-            </a:r>
-            <a:endParaRPr lang="en-US" sz="1450" dirty="0"/>
-          </a:p>
-          <a:p>
-            <a:pPr marL="342900" indent="-342900">
-              <a:lnSpc>
-                <a:spcPct val="105000"/>
-              </a:lnSpc>
-              <a:spcAft>
-                <a:spcPts val="1000"/>
-              </a:spcAft>
-              <a:buSzPct val="100000"/>
-              <a:buChar char="•"/>
-            </a:pPr>
-            <a:r>
-              <a:rPr lang="en-US" sz="1450" dirty="0">
-                <a:solidFill>
-                  <a:srgbClr val="334155"/>
-                </a:solidFill>
-                <a:latin typeface="PingFang SC" pitchFamily="34" charset="0"/>
-                <a:ea typeface="PingFang SC" pitchFamily="34" charset="-122"/>
-                <a:cs typeface="PingFang SC" pitchFamily="34" charset="-120"/>
-              </a:rPr>
-              <a:t>多 Agent 切换需冷重算，TTFT 高达 15–172 s，交互式工作流不可用</a:t>
-            </a:r>
-            <a:endParaRPr lang="en-US" sz="1450" dirty="0"/>
-          </a:p>
-        </p:txBody>
-      </p:sp>
-      <p:sp>
-        <p:nvSpPr>
-          <p:cNvPr id="10" name="Shape 8"/>
-          <p:cNvSpPr/>
-          <p:nvPr/>
-        </p:nvSpPr>
-        <p:spPr>
-          <a:xfrm>
-            <a:off x="6172200" y="1417320"/>
-            <a:ext cx="5486400" cy="2788920"/>
-          </a:xfrm>
-          <a:prstGeom prst="roundRect">
-            <a:avLst>
-              <a:gd name="adj" fmla="val 3934"/>
-            </a:avLst>
-          </a:prstGeom>
-          <a:solidFill>
-            <a:srgbClr val="ECFDF5"/>
-          </a:solidFill>
-          <a:ln w="12700">
-            <a:solidFill>
-              <a:srgbClr val="A7F3D0"/>
-            </a:solidFill>
-            <a:prstDash val="solid"/>
-          </a:ln>
-          <a:effectLst>
-            <a:outerShdw sx="100000" sy="100000" kx="0" ky="0" algn="bl" rotWithShape="0" blurRad="101600" dist="38100" dir="5400000">
-              <a:srgbClr val="000000">
-                <a:alpha val="12000"/>
-              </a:srgbClr>
-            </a:outerShdw>
-          </a:effectLst>
-        </p:spPr>
-      </p:sp>
-      <p:sp>
-        <p:nvSpPr>
-          <p:cNvPr id="11" name="Text 9"/>
-          <p:cNvSpPr/>
-          <p:nvPr/>
-        </p:nvSpPr>
-        <p:spPr>
-          <a:xfrm>
-            <a:off x="6446520" y="1600200"/>
-            <a:ext cx="4937760" cy="457200"/>
-          </a:xfrm>
-          <a:prstGeom prst="rect">
-            <a:avLst/>
-          </a:prstGeom>
-          <a:noFill/>
-          <a:ln/>
-        </p:spPr>
-        <p:txBody>
-          <a:bodyPr wrap="square" lIns="0" tIns="0" rIns="0" bIns="0" rtlCol="0" anchor="ctr"/>
-          <a:lstStyle/>
-          <a:p>
-            <a:pPr indent="0" marL="0">
-              <a:buNone/>
-            </a:pPr>
-            <a:r>
-              <a:rPr lang="en-US" sz="1800" b="1" dirty="0">
-                <a:solidFill>
-                  <a:srgbClr val="0F766E"/>
-                </a:solidFill>
-                <a:latin typeface="PingFang SC" pitchFamily="34" charset="0"/>
-                <a:ea typeface="PingFang SC" pitchFamily="34" charset="-122"/>
-                <a:cs typeface="PingFang SC" pitchFamily="34" charset="-120"/>
-              </a:rPr>
-              <a:t>我们的洞察怎么解</a:t>
-            </a:r>
-            <a:endParaRPr lang="en-US" sz="1800" dirty="0"/>
-          </a:p>
-        </p:txBody>
-      </p:sp>
-      <p:sp>
-        <p:nvSpPr>
-          <p:cNvPr id="12" name="Text 10"/>
-          <p:cNvSpPr/>
-          <p:nvPr/>
-        </p:nvSpPr>
-        <p:spPr>
-          <a:xfrm>
-            <a:off x="6492240" y="2148840"/>
-            <a:ext cx="4892040" cy="1920240"/>
-          </a:xfrm>
-          <a:prstGeom prst="rect">
-            <a:avLst/>
-          </a:prstGeom>
-          <a:noFill/>
-          <a:ln/>
-        </p:spPr>
-        <p:txBody>
-          <a:bodyPr wrap="square" rtlCol="0" anchor="t"/>
-          <a:lstStyle/>
-          <a:p>
-            <a:pPr marL="342900" indent="-342900">
-              <a:lnSpc>
-                <a:spcPct val="105000"/>
-              </a:lnSpc>
-              <a:spcAft>
-                <a:spcPts val="1000"/>
-              </a:spcAft>
-              <a:buSzPct val="100000"/>
-              <a:buChar char="•"/>
-            </a:pPr>
-            <a:r>
-              <a:rPr lang="en-US" sz="1450" dirty="0">
-                <a:solidFill>
-                  <a:srgbClr val="334155"/>
-                </a:solidFill>
-                <a:latin typeface="PingFang SC" pitchFamily="34" charset="0"/>
-                <a:ea typeface="PingFang SC" pitchFamily="34" charset="-122"/>
-                <a:cs typeface="PingFang SC" pitchFamily="34" charset="-120"/>
-              </a:rPr>
-              <a:t>KV Cache 三级分级：DRAM 热 → NVMe 温 → 3D NAND 冷</a:t>
-            </a:r>
-            <a:endParaRPr lang="en-US" sz="1450" dirty="0"/>
-          </a:p>
-          <a:p>
-            <a:pPr marL="342900" indent="-342900">
-              <a:lnSpc>
-                <a:spcPct val="105000"/>
-              </a:lnSpc>
-              <a:spcAft>
-                <a:spcPts val="1000"/>
-              </a:spcAft>
-              <a:buSzPct val="100000"/>
-              <a:buChar char="•"/>
-            </a:pPr>
-            <a:r>
-              <a:rPr lang="en-US" sz="1450" dirty="0">
-                <a:solidFill>
-                  <a:srgbClr val="334155"/>
-                </a:solidFill>
-                <a:latin typeface="PingFang SC" pitchFamily="34" charset="0"/>
-                <a:ea typeface="PingFang SC" pitchFamily="34" charset="-122"/>
-                <a:cs typeface="PingFang SC" pitchFamily="34" charset="-120"/>
-              </a:rPr>
-              <a:t>Q4 量化压到约 28% 体积；持久化跳过 prefill；KVNAND 闪存内注意力计算</a:t>
-            </a:r>
-            <a:endParaRPr lang="en-US" sz="1450" dirty="0"/>
-          </a:p>
-        </p:txBody>
-      </p:sp>
-      <p:sp>
-        <p:nvSpPr>
-          <p:cNvPr id="13" name="Shape 11"/>
-          <p:cNvSpPr/>
-          <p:nvPr/>
-        </p:nvSpPr>
-        <p:spPr>
-          <a:xfrm>
-            <a:off x="6172200" y="4434840"/>
-            <a:ext cx="2583180" cy="1417320"/>
-          </a:xfrm>
-          <a:prstGeom prst="roundRect">
-            <a:avLst>
-              <a:gd name="adj" fmla="val 6452"/>
-            </a:avLst>
-          </a:prstGeom>
-          <a:solidFill>
-            <a:srgbClr val="2563EB"/>
-          </a:solidFill>
-          <a:ln w="12700">
-            <a:solidFill>
-              <a:srgbClr val="2563EB"/>
-            </a:solidFill>
-            <a:prstDash val="solid"/>
-          </a:ln>
-          <a:effectLst>
-            <a:outerShdw sx="100000" sy="100000" kx="0" ky="0" algn="bl" rotWithShape="0" blurRad="101600" dist="38100" dir="5400000">
-              <a:srgbClr val="000000">
-                <a:alpha val="12000"/>
-              </a:srgbClr>
-            </a:outerShdw>
-          </a:effectLst>
-        </p:spPr>
-      </p:sp>
-      <p:sp>
-        <p:nvSpPr>
-          <p:cNvPr id="14" name="Text 12"/>
-          <p:cNvSpPr/>
-          <p:nvPr/>
-        </p:nvSpPr>
-        <p:spPr>
-          <a:xfrm>
-            <a:off x="6172200" y="4572000"/>
-            <a:ext cx="2583180" cy="685800"/>
-          </a:xfrm>
-          <a:prstGeom prst="rect">
-            <a:avLst/>
-          </a:prstGeom>
-          <a:noFill/>
-          <a:ln/>
-        </p:spPr>
-        <p:txBody>
-          <a:bodyPr wrap="square" lIns="0" tIns="0" rIns="0" bIns="0" rtlCol="0" anchor="ctr"/>
-          <a:lstStyle/>
-          <a:p>
-            <a:pPr algn="ctr" indent="0" marL="0">
-              <a:buNone/>
-            </a:pPr>
-            <a:r>
-              <a:rPr lang="en-US" sz="3000" b="1" dirty="0">
-                <a:solidFill>
-                  <a:srgbClr val="FFFFFF"/>
-                </a:solidFill>
-                <a:latin typeface="PingFang SC" pitchFamily="34" charset="0"/>
-                <a:ea typeface="PingFang SC" pitchFamily="34" charset="-122"/>
-                <a:cs typeface="PingFang SC" pitchFamily="34" charset="-120"/>
-              </a:rPr>
-              <a:t>172s→1.8s</a:t>
-            </a:r>
-            <a:endParaRPr lang="en-US" sz="3000" dirty="0"/>
-          </a:p>
-        </p:txBody>
-      </p:sp>
-      <p:sp>
-        <p:nvSpPr>
-          <p:cNvPr id="15" name="Text 13"/>
-          <p:cNvSpPr/>
-          <p:nvPr/>
-        </p:nvSpPr>
-        <p:spPr>
-          <a:xfrm>
-            <a:off x="6263640" y="5285232"/>
-            <a:ext cx="2400300" cy="457200"/>
-          </a:xfrm>
-          <a:prstGeom prst="rect">
-            <a:avLst/>
-          </a:prstGeom>
-          <a:noFill/>
-          <a:ln/>
-        </p:spPr>
-        <p:txBody>
-          <a:bodyPr wrap="square" lIns="0" tIns="0" rIns="0" bIns="0" rtlCol="0" anchor="ctr"/>
-          <a:lstStyle/>
-          <a:p>
-            <a:pPr algn="ctr" indent="0" marL="0">
-              <a:buNone/>
-            </a:pPr>
-            <a:r>
-              <a:rPr lang="en-US" sz="1200" dirty="0">
-                <a:solidFill>
-                  <a:srgbClr val="F1F5F9"/>
-                </a:solidFill>
-                <a:latin typeface="PingFang SC" pitchFamily="34" charset="0"/>
-                <a:ea typeface="PingFang SC" pitchFamily="34" charset="-122"/>
-                <a:cs typeface="PingFang SC" pitchFamily="34" charset="-120"/>
-              </a:rPr>
-              <a:t>上下文切换 TTFT（约 94×）</a:t>
-            </a:r>
-            <a:endParaRPr lang="en-US" sz="1200" dirty="0"/>
-          </a:p>
-        </p:txBody>
-      </p:sp>
-      <p:sp>
-        <p:nvSpPr>
-          <p:cNvPr id="16" name="Shape 14"/>
-          <p:cNvSpPr/>
-          <p:nvPr/>
-        </p:nvSpPr>
-        <p:spPr>
-          <a:xfrm>
-            <a:off x="9075420" y="4434840"/>
-            <a:ext cx="2583180" cy="1417320"/>
-          </a:xfrm>
-          <a:prstGeom prst="roundRect">
-            <a:avLst>
-              <a:gd name="adj" fmla="val 6452"/>
-            </a:avLst>
-          </a:prstGeom>
-          <a:solidFill>
-            <a:srgbClr val="2563EB"/>
-          </a:solidFill>
-          <a:ln w="12700">
-            <a:solidFill>
-              <a:srgbClr val="2563EB"/>
-            </a:solidFill>
-            <a:prstDash val="solid"/>
-          </a:ln>
-          <a:effectLst>
-            <a:outerShdw sx="100000" sy="100000" kx="0" ky="0" algn="bl" rotWithShape="0" blurRad="101600" dist="38100" dir="5400000">
-              <a:srgbClr val="000000">
-                <a:alpha val="12000"/>
-              </a:srgbClr>
-            </a:outerShdw>
-          </a:effectLst>
-        </p:spPr>
-      </p:sp>
-      <p:sp>
-        <p:nvSpPr>
-          <p:cNvPr id="17" name="Text 15"/>
-          <p:cNvSpPr/>
-          <p:nvPr/>
-        </p:nvSpPr>
-        <p:spPr>
-          <a:xfrm>
-            <a:off x="9075420" y="4572000"/>
-            <a:ext cx="2583180" cy="685800"/>
-          </a:xfrm>
-          <a:prstGeom prst="rect">
-            <a:avLst/>
-          </a:prstGeom>
-          <a:noFill/>
-          <a:ln/>
-        </p:spPr>
-        <p:txBody>
-          <a:bodyPr wrap="square" lIns="0" tIns="0" rIns="0" bIns="0" rtlCol="0" anchor="ctr"/>
-          <a:lstStyle/>
-          <a:p>
-            <a:pPr algn="ctr" indent="0" marL="0">
-              <a:buNone/>
-            </a:pPr>
-            <a:r>
-              <a:rPr lang="en-US" sz="3000" b="1" dirty="0">
-                <a:solidFill>
-                  <a:srgbClr val="FFFFFF"/>
-                </a:solidFill>
-                <a:latin typeface="PingFang SC" pitchFamily="34" charset="0"/>
-                <a:ea typeface="PingFang SC" pitchFamily="34" charset="-122"/>
-                <a:cs typeface="PingFang SC" pitchFamily="34" charset="-120"/>
-              </a:rPr>
-              <a:t>≈28%</a:t>
-            </a:r>
-            <a:endParaRPr lang="en-US" sz="3000" dirty="0"/>
-          </a:p>
-        </p:txBody>
-      </p:sp>
-      <p:sp>
-        <p:nvSpPr>
-          <p:cNvPr id="18" name="Text 16"/>
-          <p:cNvSpPr/>
-          <p:nvPr/>
-        </p:nvSpPr>
-        <p:spPr>
-          <a:xfrm>
-            <a:off x="9166860" y="5285232"/>
-            <a:ext cx="2400300" cy="457200"/>
-          </a:xfrm>
-          <a:prstGeom prst="rect">
-            <a:avLst/>
-          </a:prstGeom>
-          <a:noFill/>
-          <a:ln/>
-        </p:spPr>
-        <p:txBody>
-          <a:bodyPr wrap="square" lIns="0" tIns="0" rIns="0" bIns="0" rtlCol="0" anchor="ctr"/>
-          <a:lstStyle/>
-          <a:p>
-            <a:pPr algn="ctr" indent="0" marL="0">
-              <a:buNone/>
-            </a:pPr>
-            <a:r>
-              <a:rPr lang="en-US" sz="1200" dirty="0">
-                <a:solidFill>
-                  <a:srgbClr val="F1F5F9"/>
-                </a:solidFill>
-                <a:latin typeface="PingFang SC" pitchFamily="34" charset="0"/>
-                <a:ea typeface="PingFang SC" pitchFamily="34" charset="-122"/>
-                <a:cs typeface="PingFang SC" pitchFamily="34" charset="-120"/>
-              </a:rPr>
-              <a:t>Q4 量化后体积</a:t>
-            </a:r>
-            <a:endParaRPr lang="en-US" sz="1200" dirty="0"/>
-          </a:p>
-        </p:txBody>
-      </p:sp>
-      <p:sp>
-        <p:nvSpPr>
-          <p:cNvPr id="19" name="Shape 17"/>
-          <p:cNvSpPr/>
-          <p:nvPr/>
-        </p:nvSpPr>
-        <p:spPr>
-          <a:xfrm>
-            <a:off x="548640" y="4434840"/>
-            <a:ext cx="5486400" cy="1417320"/>
-          </a:xfrm>
-          <a:prstGeom prst="roundRect">
-            <a:avLst>
-              <a:gd name="adj" fmla="val 6452"/>
-            </a:avLst>
-          </a:prstGeom>
-          <a:solidFill>
-            <a:srgbClr val="F8FAFC"/>
-          </a:solidFill>
-          <a:ln w="12700">
-            <a:solidFill>
-              <a:srgbClr val="E2E8F0"/>
-            </a:solidFill>
-            <a:prstDash val="solid"/>
-          </a:ln>
-        </p:spPr>
-      </p:sp>
-      <p:sp>
-        <p:nvSpPr>
-          <p:cNvPr id="20" name="Text 18"/>
-          <p:cNvSpPr/>
-          <p:nvPr/>
-        </p:nvSpPr>
-        <p:spPr>
-          <a:xfrm>
-            <a:off x="777240" y="4553712"/>
-            <a:ext cx="5029200" cy="365760"/>
-          </a:xfrm>
-          <a:prstGeom prst="rect">
-            <a:avLst/>
-          </a:prstGeom>
-          <a:noFill/>
-          <a:ln/>
-        </p:spPr>
-        <p:txBody>
-          <a:bodyPr wrap="square" lIns="0" tIns="0" rIns="0" bIns="0" rtlCol="0" anchor="ctr"/>
-          <a:lstStyle/>
-          <a:p>
-            <a:pPr indent="0" marL="0">
-              <a:buNone/>
-            </a:pPr>
-            <a:r>
-              <a:rPr lang="en-US" sz="1250" b="1" dirty="0">
-                <a:solidFill>
-                  <a:srgbClr val="2563EB"/>
-                </a:solidFill>
-                <a:latin typeface="PingFang SC" pitchFamily="34" charset="0"/>
-                <a:ea typeface="PingFang SC" pitchFamily="34" charset="-122"/>
-                <a:cs typeface="PingFang SC" pitchFamily="34" charset="-120"/>
-              </a:rPr>
-              <a:t>一句话</a:t>
-            </a:r>
-            <a:endParaRPr lang="en-US" sz="1250" dirty="0"/>
-          </a:p>
-        </p:txBody>
-      </p:sp>
-      <p:sp>
-        <p:nvSpPr>
-          <p:cNvPr id="21" name="Text 19"/>
-          <p:cNvSpPr/>
-          <p:nvPr/>
-        </p:nvSpPr>
-        <p:spPr>
-          <a:xfrm>
-            <a:off x="777240" y="4892040"/>
-            <a:ext cx="5029200" cy="868680"/>
-          </a:xfrm>
-          <a:prstGeom prst="rect">
-            <a:avLst/>
-          </a:prstGeom>
-          <a:noFill/>
-          <a:ln/>
-        </p:spPr>
-        <p:txBody>
-          <a:bodyPr wrap="square" lIns="0" tIns="0" rIns="0" bIns="0" rtlCol="0" anchor="t"/>
-          <a:lstStyle/>
-          <a:p>
-            <a:pPr indent="0" marL="0">
-              <a:buNone/>
-            </a:pPr>
-            <a:r>
-              <a:rPr lang="en-US" sz="1300" dirty="0">
-                <a:solidFill>
-                  <a:srgbClr val="334155"/>
-                </a:solidFill>
-                <a:latin typeface="PingFang SC" pitchFamily="34" charset="0"/>
-                <a:ea typeface="PingFang SC" pitchFamily="34" charset="-122"/>
-                <a:cs typeface="PingFang SC" pitchFamily="34" charset="-120"/>
-              </a:rPr>
-              <a:t>KV Cache 分级管理：把「长上下文 KV Cache 随序列线性膨胀」从问题变成可治理的设计点。</a:t>
-            </a:r>
-            <a:endParaRPr lang="en-US" sz="1300" dirty="0"/>
-          </a:p>
-        </p:txBody>
-      </p:sp>
-      <p:sp>
-        <p:nvSpPr>
-          <p:cNvPr id="22" name="Text 20"/>
-          <p:cNvSpPr/>
-          <p:nvPr/>
-        </p:nvSpPr>
-        <p:spPr>
-          <a:xfrm>
-            <a:off x="548640" y="6355080"/>
-            <a:ext cx="5486400" cy="274320"/>
-          </a:xfrm>
-          <a:prstGeom prst="rect">
-            <a:avLst/>
-          </a:prstGeom>
-          <a:noFill/>
-          <a:ln/>
-        </p:spPr>
-        <p:txBody>
-          <a:bodyPr wrap="square" lIns="0" tIns="0" rIns="0" bIns="0" rtlCol="0" anchor="ctr"/>
-          <a:lstStyle/>
-          <a:p>
-            <a:pPr indent="0" marL="0">
-              <a:buNone/>
-            </a:pPr>
-            <a:r>
-              <a:rPr lang="en-US" sz="1000" dirty="0">
-                <a:solidFill>
-                  <a:srgbClr val="64748B"/>
-                </a:solidFill>
-                <a:latin typeface="PingFang SC" pitchFamily="34" charset="0"/>
-                <a:ea typeface="PingFang SC" pitchFamily="34" charset="-122"/>
-                <a:cs typeface="PingFang SC" pitchFamily="34" charset="-120"/>
-              </a:rPr>
-              <a:t>N+1 · 洞察 1 / 7</a:t>
-            </a:r>
-            <a:endParaRPr lang="en-US" sz="1000" dirty="0"/>
           </a:p>
         </p:txBody>
       </p:sp>
@@ -4223,11 +4446,11 @@
             <a:avLst/>
           </a:prstGeom>
           <a:solidFill>
-            <a:srgbClr val="0D9488"/>
+            <a:srgbClr val="2563EB"/>
           </a:solidFill>
           <a:ln w="12700">
             <a:solidFill>
-              <a:srgbClr val="0D9488"/>
+              <a:srgbClr val="2563EB"/>
             </a:solidFill>
             <a:prstDash val="solid"/>
           </a:ln>
@@ -4266,7 +4489,7 @@
                 <a:ea typeface="PingFang SC" pitchFamily="34" charset="-122"/>
                 <a:cs typeface="PingFang SC" pitchFamily="34" charset="-120"/>
               </a:rPr>
-              <a:t>②</a:t>
+              <a:t>①</a:t>
             </a:r>
             <a:endParaRPr lang="en-US" sz="1800" dirty="0"/>
           </a:p>
@@ -4305,7 +4528,7 @@
                 <a:ea typeface="PingFang SC" pitchFamily="34" charset="-122"/>
                 <a:cs typeface="PingFang SC" pitchFamily="34" charset="-120"/>
               </a:rPr>
-              <a:t>端侧可编程 / 自适应内存</a:t>
+              <a:t>KV Cache 分级管理</a:t>
             </a:r>
             <a:endParaRPr lang="en-US" sz="3000" dirty="0"/>
           </a:p>
@@ -4332,7 +4555,7 @@
           </a:solidFill>
           <a:ln w="12700">
             <a:solidFill>
-              <a:srgbClr val="0D9488"/>
+              <a:srgbClr val="2563EB"/>
             </a:solidFill>
             <a:prstDash val="solid"/>
           </a:ln>
@@ -4365,13 +4588,13 @@
             <a:r>
               <a:rPr lang="en-US" sz="1100" b="1" dirty="0">
                 <a:solidFill>
-                  <a:srgbClr val="0D9488"/>
-                </a:solidFill>
-                <a:latin typeface="PingFang SC" pitchFamily="34" charset="0"/>
-                <a:ea typeface="PingFang SC" pitchFamily="34" charset="-122"/>
-                <a:cs typeface="PingFang SC" pitchFamily="34" charset="-120"/>
-              </a:rPr>
-              <a:t>模块：OS 内核内存管理</a:t>
+                  <a:srgbClr val="2563EB"/>
+                </a:solidFill>
+                <a:latin typeface="PingFang SC" pitchFamily="34" charset="0"/>
+                <a:ea typeface="PingFang SC" pitchFamily="34" charset="-122"/>
+                <a:cs typeface="PingFang SC" pitchFamily="34" charset="-120"/>
+              </a:rPr>
+              <a:t>模块：应用层 ↔ 存储层</a:t>
             </a:r>
             <a:endParaRPr lang="en-US" sz="1100" dirty="0"/>
           </a:p>
@@ -4490,7 +4713,7 @@
                 <a:ea typeface="PingFang SC" pitchFamily="34" charset="-122"/>
                 <a:cs typeface="PingFang SC" pitchFamily="34" charset="-120"/>
               </a:rPr>
-              <a:t>内核策略固定、一刀切：全有或全无的 THP 在长跑下严重碎片化</a:t>
+              <a:t>长上下文 KV Cache 随序列线性膨胀，32K 上下文单请求约 4.3 GB，超出端侧 DRAM</a:t>
             </a:r>
             <a:endParaRPr lang="en-US" sz="1450" dirty="0"/>
           </a:p>
@@ -4514,7 +4737,7 @@
                 <a:ea typeface="PingFang SC" pitchFamily="34" charset="-122"/>
                 <a:cs typeface="PingFang SC" pitchFamily="34" charset="-120"/>
               </a:rPr>
-              <a:t>固定 LMKD 阈值，要么杀晚（卡顿）、要么杀早（冷启动慢）</a:t>
+              <a:t>多 Agent 切换需冷重算，TTFT 高达 15–172 s，交互式工作流不可用</a:t>
             </a:r>
             <a:endParaRPr lang="en-US" sz="1450" dirty="0"/>
           </a:p>
@@ -4633,7 +4856,7 @@
                 <a:ea typeface="PingFang SC" pitchFamily="34" charset="-122"/>
                 <a:cs typeface="PingFang SC" pitchFamily="34" charset="-120"/>
               </a:rPr>
-              <a:t>多尺寸 mTHP + DAMON 访问监控驱动主动回收（省 32% 内存 @ 约 1.9% 开销）</a:t>
+              <a:t>KV Cache 三级分级：DRAM 热 → NVMe 温 → 3D NAND 冷</a:t>
             </a:r>
             <a:endParaRPr lang="en-US" sz="1450" dirty="0"/>
           </a:p>
@@ -4657,7 +4880,7 @@
                 <a:ea typeface="PingFang SC" pitchFamily="34" charset="-122"/>
                 <a:cs typeface="PingFang SC" pitchFamily="34" charset="-120"/>
               </a:rPr>
-              <a:t>SWAM 自适应换页 + 杀进程；eBPF 钩子让策略按负载可定制</a:t>
+              <a:t>Q4 量化压到约 28% 体积；持久化跳过 prefill；KVNAND 闪存内注意力计算</a:t>
             </a:r>
             <a:endParaRPr lang="en-US" sz="1450" dirty="0"/>
           </a:p>
@@ -4680,11 +4903,11 @@
             </a:avLst>
           </a:prstGeom>
           <a:solidFill>
-            <a:srgbClr val="0D9488"/>
+            <a:srgbClr val="2563EB"/>
           </a:solidFill>
           <a:ln w="12700">
             <a:solidFill>
-              <a:srgbClr val="0D9488"/>
+              <a:srgbClr val="2563EB"/>
             </a:solidFill>
             <a:prstDash val="solid"/>
           </a:ln>
@@ -4730,7 +4953,7 @@
                 <a:ea typeface="PingFang SC" pitchFamily="34" charset="-122"/>
                 <a:cs typeface="PingFang SC" pitchFamily="34" charset="-120"/>
               </a:rPr>
-              <a:t>50%→&lt;10%</a:t>
+              <a:t>172s→1.8s</a:t>
             </a:r>
             <a:endParaRPr lang="en-US" sz="3000" dirty="0"/>
           </a:p>
@@ -4769,7 +4992,7 @@
                 <a:ea typeface="PingFang SC" pitchFamily="34" charset="-122"/>
                 <a:cs typeface="PingFang SC" pitchFamily="34" charset="-120"/>
               </a:rPr>
-              <a:t>THP 成功率（运行 2h 后）</a:t>
+              <a:t>上下文切换 TTFT（约 94×）</a:t>
             </a:r>
             <a:endParaRPr lang="en-US" sz="1200" dirty="0"/>
           </a:p>
@@ -4792,11 +5015,11 @@
             </a:avLst>
           </a:prstGeom>
           <a:solidFill>
-            <a:srgbClr val="0D9488"/>
+            <a:srgbClr val="2563EB"/>
           </a:solidFill>
           <a:ln w="12700">
             <a:solidFill>
-              <a:srgbClr val="0D9488"/>
+              <a:srgbClr val="2563EB"/>
             </a:solidFill>
             <a:prstDash val="solid"/>
           </a:ln>
@@ -4842,7 +5065,7 @@
                 <a:ea typeface="PingFang SC" pitchFamily="34" charset="-122"/>
                 <a:cs typeface="PingFang SC" pitchFamily="34" charset="-120"/>
               </a:rPr>
-              <a:t>−6.5×</a:t>
+              <a:t>≈28%</a:t>
             </a:r>
             <a:endParaRPr lang="en-US" sz="3000" dirty="0"/>
           </a:p>
@@ -4881,7 +5104,7 @@
                 <a:ea typeface="PingFang SC" pitchFamily="34" charset="-122"/>
                 <a:cs typeface="PingFang SC" pitchFamily="34" charset="-120"/>
               </a:rPr>
-              <a:t>SWAM OOM kill</a:t>
+              <a:t>Q4 量化后体积</a:t>
             </a:r>
             <a:endParaRPr lang="en-US" sz="1200" dirty="0"/>
           </a:p>
@@ -4941,7 +5164,7 @@
             <a:r>
               <a:rPr lang="en-US" sz="1250" b="1" dirty="0">
                 <a:solidFill>
-                  <a:srgbClr val="0D9488"/>
+                  <a:srgbClr val="2563EB"/>
                 </a:solidFill>
                 <a:latin typeface="PingFang SC" pitchFamily="34" charset="0"/>
                 <a:ea typeface="PingFang SC" pitchFamily="34" charset="-122"/>
@@ -4986,7 +5209,7 @@
                 <a:ea typeface="PingFang SC" pitchFamily="34" charset="-122"/>
                 <a:cs typeface="PingFang SC" pitchFamily="34" charset="-120"/>
               </a:rPr>
-              <a:t>端侧可编程 / 自适应内存：把「内核策略固定、一刀切：全有或全无的 THP 在长跑下严重碎片化」从问题变成可治理的设计点。</a:t>
+              <a:t>KV Cache 分级管理：把「长上下文 KV Cache 随序列线性膨胀」从问题变成可治理的设计点。</a:t>
             </a:r>
             <a:endParaRPr lang="en-US" sz="1300" dirty="0"/>
           </a:p>
@@ -5025,7 +5248,7 @@
                 <a:ea typeface="PingFang SC" pitchFamily="34" charset="-122"/>
                 <a:cs typeface="PingFang SC" pitchFamily="34" charset="-120"/>
               </a:rPr>
-              <a:t>N+1 · 洞察 2 / 7</a:t>
+              <a:t>N+1 · 洞察 1 / 7</a:t>
             </a:r>
             <a:endParaRPr lang="en-US" sz="1000" dirty="0"/>
           </a:p>
@@ -5078,11 +5301,11 @@
             <a:avLst/>
           </a:prstGeom>
           <a:solidFill>
-            <a:srgbClr val="EA580C"/>
+            <a:srgbClr val="0D9488"/>
           </a:solidFill>
           <a:ln w="12700">
             <a:solidFill>
-              <a:srgbClr val="EA580C"/>
+              <a:srgbClr val="0D9488"/>
             </a:solidFill>
             <a:prstDash val="solid"/>
           </a:ln>
@@ -5121,7 +5344,7 @@
                 <a:ea typeface="PingFang SC" pitchFamily="34" charset="-122"/>
                 <a:cs typeface="PingFang SC" pitchFamily="34" charset="-120"/>
               </a:rPr>
-              <a:t>③</a:t>
+              <a:t>②</a:t>
             </a:r>
             <a:endParaRPr lang="en-US" sz="1800" dirty="0"/>
           </a:p>
@@ -5160,7 +5383,7 @@
                 <a:ea typeface="PingFang SC" pitchFamily="34" charset="-122"/>
                 <a:cs typeface="PingFang SC" pitchFamily="34" charset="-120"/>
               </a:rPr>
-              <a:t>内存带宽：供给 + 利用</a:t>
+              <a:t>端侧可编程 / 自适应内存</a:t>
             </a:r>
             <a:endParaRPr lang="en-US" sz="3000" dirty="0"/>
           </a:p>
@@ -5187,7 +5410,7 @@
           </a:solidFill>
           <a:ln w="12700">
             <a:solidFill>
-              <a:srgbClr val="EA580C"/>
+              <a:srgbClr val="0D9488"/>
             </a:solidFill>
             <a:prstDash val="solid"/>
           </a:ln>
@@ -5220,13 +5443,13 @@
             <a:r>
               <a:rPr lang="en-US" sz="1100" b="1" dirty="0">
                 <a:solidFill>
-                  <a:srgbClr val="EA580C"/>
-                </a:solidFill>
-                <a:latin typeface="PingFang SC" pitchFamily="34" charset="0"/>
-                <a:ea typeface="PingFang SC" pitchFamily="34" charset="-122"/>
-                <a:cs typeface="PingFang SC" pitchFamily="34" charset="-120"/>
-              </a:rPr>
-              <a:t>模块：SoC 计算 IP ↔ 内存子系统</a:t>
+                  <a:srgbClr val="0D9488"/>
+                </a:solidFill>
+                <a:latin typeface="PingFang SC" pitchFamily="34" charset="0"/>
+                <a:ea typeface="PingFang SC" pitchFamily="34" charset="-122"/>
+                <a:cs typeface="PingFang SC" pitchFamily="34" charset="-120"/>
+              </a:rPr>
+              <a:t>模块：OS 内核内存管理</a:t>
             </a:r>
             <a:endParaRPr lang="en-US" sz="1100" dirty="0"/>
           </a:p>
@@ -5345,7 +5568,7 @@
                 <a:ea typeface="PingFang SC" pitchFamily="34" charset="-122"/>
                 <a:cs typeface="PingFang SC" pitchFamily="34" charset="-120"/>
               </a:rPr>
-              <a:t>端侧解码受内存带宽限：LPDDR5 约 51 GB/s 把 7B 卡在约 14 tok/s</a:t>
+              <a:t>内核策略固定、一刀切：全有或全无的 THP 在长跑下严重碎片化</a:t>
             </a:r>
             <a:endParaRPr lang="en-US" sz="1450" dirty="0"/>
           </a:p>
@@ -5369,7 +5592,7 @@
                 <a:ea typeface="PingFang SC" pitchFamily="34" charset="-122"/>
                 <a:cs typeface="PingFang SC" pitchFamily="34" charset="-120"/>
               </a:rPr>
-              <a:t>单一加速器只用满约 60% 的 DRAM 总线，带宽被浪费</a:t>
+              <a:t>固定 LMKD 阈值，要么杀晚（卡顿）、要么杀早（冷启动慢）</a:t>
             </a:r>
             <a:endParaRPr lang="en-US" sz="1450" dirty="0"/>
           </a:p>
@@ -5488,7 +5711,7 @@
                 <a:ea typeface="PingFang SC" pitchFamily="34" charset="-122"/>
                 <a:cs typeface="PingFang SC" pitchFamily="34" charset="-120"/>
               </a:rPr>
-              <a:t>供给侧加宽：LPDDR5X +67% 带宽、2× 容量、−25% 功耗</a:t>
+              <a:t>多尺寸 mTHP + DAMON 访问监控驱动主动回收（省 32% 内存 @ 约 1.9% 开销）</a:t>
             </a:r>
             <a:endParaRPr lang="en-US" sz="1450" dirty="0"/>
           </a:p>
@@ -5512,7 +5735,7 @@
                 <a:ea typeface="PingFang SC" pitchFamily="34" charset="-122"/>
                 <a:cs typeface="PingFang SC" pitchFamily="34" charset="-120"/>
               </a:rPr>
-              <a:t>利用侧榨满：CPU/GPU/NPU 异构协同（预填充→NPU、解码→GPU）</a:t>
+              <a:t>SWAM 自适应换页 + 杀进程；eBPF 钩子让策略按负载可定制</a:t>
             </a:r>
             <a:endParaRPr lang="en-US" sz="1450" dirty="0"/>
           </a:p>
@@ -5535,11 +5758,11 @@
             </a:avLst>
           </a:prstGeom>
           <a:solidFill>
-            <a:srgbClr val="EA580C"/>
+            <a:srgbClr val="0D9488"/>
           </a:solidFill>
           <a:ln w="12700">
             <a:solidFill>
-              <a:srgbClr val="EA580C"/>
+              <a:srgbClr val="0D9488"/>
             </a:solidFill>
             <a:prstDash val="solid"/>
           </a:ln>
@@ -5585,7 +5808,7 @@
                 <a:ea typeface="PingFang SC" pitchFamily="34" charset="-122"/>
                 <a:cs typeface="PingFang SC" pitchFamily="34" charset="-120"/>
               </a:rPr>
-              <a:t>60%→88%</a:t>
+              <a:t>50%→&lt;10%</a:t>
             </a:r>
             <a:endParaRPr lang="en-US" sz="3000" dirty="0"/>
           </a:p>
@@ -5624,7 +5847,7 @@
                 <a:ea typeface="PingFang SC" pitchFamily="34" charset="-122"/>
                 <a:cs typeface="PingFang SC" pitchFamily="34" charset="-120"/>
               </a:rPr>
-              <a:t>DRAM 带宽利用率</a:t>
+              <a:t>THP 成功率（运行 2h 后）</a:t>
             </a:r>
             <a:endParaRPr lang="en-US" sz="1200" dirty="0"/>
           </a:p>
@@ -5647,11 +5870,11 @@
             </a:avLst>
           </a:prstGeom>
           <a:solidFill>
-            <a:srgbClr val="EA580C"/>
+            <a:srgbClr val="0D9488"/>
           </a:solidFill>
           <a:ln w="12700">
             <a:solidFill>
-              <a:srgbClr val="EA580C"/>
+              <a:srgbClr val="0D9488"/>
             </a:solidFill>
             <a:prstDash val="solid"/>
           </a:ln>
@@ -5697,7 +5920,7 @@
                 <a:ea typeface="PingFang SC" pitchFamily="34" charset="-122"/>
                 <a:cs typeface="PingFang SC" pitchFamily="34" charset="-120"/>
               </a:rPr>
-              <a:t>−4.6×</a:t>
+              <a:t>−6.5×</a:t>
             </a:r>
             <a:endParaRPr lang="en-US" sz="3000" dirty="0"/>
           </a:p>
@@ -5736,7 +5959,7 @@
                 <a:ea typeface="PingFang SC" pitchFamily="34" charset="-122"/>
                 <a:cs typeface="PingFang SC" pitchFamily="34" charset="-120"/>
               </a:rPr>
-              <a:t>reactive 延迟</a:t>
+              <a:t>SWAM OOM kill</a:t>
             </a:r>
             <a:endParaRPr lang="en-US" sz="1200" dirty="0"/>
           </a:p>
@@ -5796,7 +6019,7 @@
             <a:r>
               <a:rPr lang="en-US" sz="1250" b="1" dirty="0">
                 <a:solidFill>
-                  <a:srgbClr val="EA580C"/>
+                  <a:srgbClr val="0D9488"/>
                 </a:solidFill>
                 <a:latin typeface="PingFang SC" pitchFamily="34" charset="0"/>
                 <a:ea typeface="PingFang SC" pitchFamily="34" charset="-122"/>
@@ -5841,7 +6064,7 @@
                 <a:ea typeface="PingFang SC" pitchFamily="34" charset="-122"/>
                 <a:cs typeface="PingFang SC" pitchFamily="34" charset="-120"/>
               </a:rPr>
-              <a:t>内存带宽：供给 + 利用：把「端侧解码受内存带宽限：LPDDR5 约 51 GB/s 把 7B 卡在约 14 tok/s」从问题变成可治理的设计点。</a:t>
+              <a:t>端侧可编程 / 自适应内存：把「内核策略固定、一刀切：全有或全无的 THP 在长跑下严重碎片化」从问题变成可治理的设计点。</a:t>
             </a:r>
             <a:endParaRPr lang="en-US" sz="1300" dirty="0"/>
           </a:p>
@@ -5880,7 +6103,7 @@
                 <a:ea typeface="PingFang SC" pitchFamily="34" charset="-122"/>
                 <a:cs typeface="PingFang SC" pitchFamily="34" charset="-120"/>
               </a:rPr>
-              <a:t>N+1 · 洞察 3 / 7</a:t>
+              <a:t>N+1 · 洞察 2 / 7</a:t>
             </a:r>
             <a:endParaRPr lang="en-US" sz="1000" dirty="0"/>
           </a:p>
@@ -5933,11 +6156,11 @@
             <a:avLst/>
           </a:prstGeom>
           <a:solidFill>
-            <a:srgbClr val="16A34A"/>
+            <a:srgbClr val="EA580C"/>
           </a:solidFill>
           <a:ln w="12700">
             <a:solidFill>
-              <a:srgbClr val="16A34A"/>
+              <a:srgbClr val="EA580C"/>
             </a:solidFill>
             <a:prstDash val="solid"/>
           </a:ln>
@@ -5976,7 +6199,7 @@
                 <a:ea typeface="PingFang SC" pitchFamily="34" charset="-122"/>
                 <a:cs typeface="PingFang SC" pitchFamily="34" charset="-120"/>
               </a:rPr>
-              <a:t>④</a:t>
+              <a:t>③</a:t>
             </a:r>
             <a:endParaRPr lang="en-US" sz="1800" dirty="0"/>
           </a:p>
@@ -6015,7 +6238,7 @@
                 <a:ea typeface="PingFang SC" pitchFamily="34" charset="-122"/>
                 <a:cs typeface="PingFang SC" pitchFamily="34" charset="-120"/>
               </a:rPr>
-              <a:t>端侧分级内存</a:t>
+              <a:t>内存带宽：供给 + 利用</a:t>
             </a:r>
             <a:endParaRPr lang="en-US" sz="3000" dirty="0"/>
           </a:p>
@@ -6042,7 +6265,7 @@
           </a:solidFill>
           <a:ln w="12700">
             <a:solidFill>
-              <a:srgbClr val="16A34A"/>
+              <a:srgbClr val="EA580C"/>
             </a:solidFill>
             <a:prstDash val="solid"/>
           </a:ln>
@@ -6075,13 +6298,13 @@
             <a:r>
               <a:rPr lang="en-US" sz="1100" b="1" dirty="0">
                 <a:solidFill>
-                  <a:srgbClr val="16A34A"/>
-                </a:solidFill>
-                <a:latin typeface="PingFang SC" pitchFamily="34" charset="0"/>
-                <a:ea typeface="PingFang SC" pitchFamily="34" charset="-122"/>
-                <a:cs typeface="PingFang SC" pitchFamily="34" charset="-120"/>
-              </a:rPr>
-              <a:t>模块：OS 内核 MM · 压缩内存↔swap</a:t>
+                  <a:srgbClr val="EA580C"/>
+                </a:solidFill>
+                <a:latin typeface="PingFang SC" pitchFamily="34" charset="0"/>
+                <a:ea typeface="PingFang SC" pitchFamily="34" charset="-122"/>
+                <a:cs typeface="PingFang SC" pitchFamily="34" charset="-120"/>
+              </a:rPr>
+              <a:t>模块：SoC 计算 IP ↔ 内存子系统</a:t>
             </a:r>
             <a:endParaRPr lang="en-US" sz="1100" dirty="0"/>
           </a:p>
@@ -6200,7 +6423,7 @@
                 <a:ea typeface="PingFang SC" pitchFamily="34" charset="-122"/>
                 <a:cs typeface="PingFang SC" pitchFamily="34" charset="-120"/>
               </a:rPr>
-              <a:t>DRAM 有界且共享，通用 LRU 回收要么杀进程、要么卡顿</a:t>
+              <a:t>端侧解码受内存带宽限：LPDDR5 约 51 GB/s 把 7B 卡在约 14 tok/s</a:t>
             </a:r>
             <a:endParaRPr lang="en-US" sz="1450" dirty="0"/>
           </a:p>
@@ -6224,7 +6447,7 @@
                 <a:ea typeface="PingFang SC" pitchFamily="34" charset="-122"/>
                 <a:cs typeface="PingFang SC" pitchFamily="34" charset="-120"/>
               </a:rPr>
-              <a:t>冷页白占 DRAM；GB 级 App 冷启动频发（86.6% 越过 1 s 悬崖）</a:t>
+              <a:t>单一加速器只用满约 60% 的 DRAM 总线，带宽被浪费</a:t>
             </a:r>
             <a:endParaRPr lang="en-US" sz="1450" dirty="0"/>
           </a:p>
@@ -6343,7 +6566,7 @@
                 <a:ea typeface="PingFang SC" pitchFamily="34" charset="-122"/>
                 <a:cs typeface="PingFang SC" pitchFamily="34" charset="-120"/>
               </a:rPr>
-              <a:t>DRAM ↔ 压缩内存（zram/zswap ≈ 2:1）↔ Flash 三级分级</a:t>
+              <a:t>供给侧加宽：LPDDR5X +67% 带宽、2× 容量、−25% 功耗</a:t>
             </a:r>
             <a:endParaRPr lang="en-US" sz="1450" dirty="0"/>
           </a:p>
@@ -6367,7 +6590,7 @@
                 <a:ea typeface="PingFang SC" pitchFamily="34" charset="-122"/>
                 <a:cs typeface="PingFang SC" pitchFamily="34" charset="-120"/>
               </a:rPr>
-              <a:t>MGLRU 冷热分代 + AppFlow 预测式预取 / 回收</a:t>
+              <a:t>利用侧榨满：CPU/GPU/NPU 异构协同（预填充→NPU、解码→GPU）</a:t>
             </a:r>
             <a:endParaRPr lang="en-US" sz="1450" dirty="0"/>
           </a:p>
@@ -6390,11 +6613,11 @@
             </a:avLst>
           </a:prstGeom>
           <a:solidFill>
-            <a:srgbClr val="16A34A"/>
+            <a:srgbClr val="EA580C"/>
           </a:solidFill>
           <a:ln w="12700">
             <a:solidFill>
-              <a:srgbClr val="16A34A"/>
+              <a:srgbClr val="EA580C"/>
             </a:solidFill>
             <a:prstDash val="solid"/>
           </a:ln>
@@ -6440,7 +6663,7 @@
                 <a:ea typeface="PingFang SC" pitchFamily="34" charset="-122"/>
                 <a:cs typeface="PingFang SC" pitchFamily="34" charset="-120"/>
               </a:rPr>
-              <a:t>2s→690ms</a:t>
+              <a:t>60%→88%</a:t>
             </a:r>
             <a:endParaRPr lang="en-US" sz="3000" dirty="0"/>
           </a:p>
@@ -6479,7 +6702,7 @@
                 <a:ea typeface="PingFang SC" pitchFamily="34" charset="-122"/>
                 <a:cs typeface="PingFang SC" pitchFamily="34" charset="-120"/>
               </a:rPr>
-              <a:t>GB App 冷启动（AppFlow）</a:t>
+              <a:t>DRAM 带宽利用率</a:t>
             </a:r>
             <a:endParaRPr lang="en-US" sz="1200" dirty="0"/>
           </a:p>
@@ -6502,11 +6725,11 @@
             </a:avLst>
           </a:prstGeom>
           <a:solidFill>
-            <a:srgbClr val="16A34A"/>
+            <a:srgbClr val="EA580C"/>
           </a:solidFill>
           <a:ln w="12700">
             <a:solidFill>
-              <a:srgbClr val="16A34A"/>
+              <a:srgbClr val="EA580C"/>
             </a:solidFill>
             <a:prstDash val="solid"/>
           </a:ln>
@@ -6552,7 +6775,7 @@
                 <a:ea typeface="PingFang SC" pitchFamily="34" charset="-122"/>
                 <a:cs typeface="PingFang SC" pitchFamily="34" charset="-120"/>
               </a:rPr>
-              <a:t>−85%</a:t>
+              <a:t>−4.6×</a:t>
             </a:r>
             <a:endParaRPr lang="en-US" sz="3000" dirty="0"/>
           </a:p>
@@ -6591,7 +6814,7 @@
                 <a:ea typeface="PingFang SC" pitchFamily="34" charset="-122"/>
                 <a:cs typeface="PingFang SC" pitchFamily="34" charset="-120"/>
               </a:rPr>
-              <a:t>MGLRU 低内存杀进程</a:t>
+              <a:t>reactive 延迟</a:t>
             </a:r>
             <a:endParaRPr lang="en-US" sz="1200" dirty="0"/>
           </a:p>
@@ -6651,7 +6874,7 @@
             <a:r>
               <a:rPr lang="en-US" sz="1250" b="1" dirty="0">
                 <a:solidFill>
-                  <a:srgbClr val="16A34A"/>
+                  <a:srgbClr val="EA580C"/>
                 </a:solidFill>
                 <a:latin typeface="PingFang SC" pitchFamily="34" charset="0"/>
                 <a:ea typeface="PingFang SC" pitchFamily="34" charset="-122"/>
@@ -6696,7 +6919,7 @@
                 <a:ea typeface="PingFang SC" pitchFamily="34" charset="-122"/>
                 <a:cs typeface="PingFang SC" pitchFamily="34" charset="-120"/>
               </a:rPr>
-              <a:t>端侧分级内存：把「DRAM 有界且共享」从问题变成可治理的设计点。</a:t>
+              <a:t>内存带宽：供给 + 利用：把「端侧解码受内存带宽限：LPDDR5 约 51 GB/s 把 7B 卡在约 14 tok/s」从问题变成可治理的设计点。</a:t>
             </a:r>
             <a:endParaRPr lang="en-US" sz="1300" dirty="0"/>
           </a:p>
@@ -6735,7 +6958,7 @@
                 <a:ea typeface="PingFang SC" pitchFamily="34" charset="-122"/>
                 <a:cs typeface="PingFang SC" pitchFamily="34" charset="-120"/>
               </a:rPr>
-              <a:t>N+1 · 洞察 4 / 7</a:t>
+              <a:t>N+1 · 洞察 3 / 7</a:t>
             </a:r>
             <a:endParaRPr lang="en-US" sz="1000" dirty="0"/>
           </a:p>
@@ -6788,11 +7011,11 @@
             <a:avLst/>
           </a:prstGeom>
           <a:solidFill>
-            <a:srgbClr val="DC2626"/>
+            <a:srgbClr val="16A34A"/>
           </a:solidFill>
           <a:ln w="12700">
             <a:solidFill>
-              <a:srgbClr val="DC2626"/>
+              <a:srgbClr val="16A34A"/>
             </a:solidFill>
             <a:prstDash val="solid"/>
           </a:ln>
@@ -6831,7 +7054,7 @@
                 <a:ea typeface="PingFang SC" pitchFamily="34" charset="-122"/>
                 <a:cs typeface="PingFang SC" pitchFamily="34" charset="-120"/>
               </a:rPr>
-              <a:t>⑤</a:t>
+              <a:t>④</a:t>
             </a:r>
             <a:endParaRPr lang="en-US" sz="1800" dirty="0"/>
           </a:p>
@@ -6870,7 +7093,7 @@
                 <a:ea typeface="PingFang SC" pitchFamily="34" charset="-122"/>
                 <a:cs typeface="PingFang SC" pitchFamily="34" charset="-120"/>
               </a:rPr>
-              <a:t>ARM 内存安全 / 机密计算</a:t>
+              <a:t>端侧分级内存</a:t>
             </a:r>
             <a:endParaRPr lang="en-US" sz="3000" dirty="0"/>
           </a:p>
@@ -6897,7 +7120,7 @@
           </a:solidFill>
           <a:ln w="12700">
             <a:solidFill>
-              <a:srgbClr val="DC2626"/>
+              <a:srgbClr val="16A34A"/>
             </a:solidFill>
             <a:prstDash val="solid"/>
           </a:ln>
@@ -6930,13 +7153,13 @@
             <a:r>
               <a:rPr lang="en-US" sz="1100" b="1" dirty="0">
                 <a:solidFill>
-                  <a:srgbClr val="DC2626"/>
-                </a:solidFill>
-                <a:latin typeface="PingFang SC" pitchFamily="34" charset="0"/>
-                <a:ea typeface="PingFang SC" pitchFamily="34" charset="-122"/>
-                <a:cs typeface="PingFang SC" pitchFamily="34" charset="-120"/>
-              </a:rPr>
-              <a:t>模块：横切全栈数据面</a:t>
+                  <a:srgbClr val="16A34A"/>
+                </a:solidFill>
+                <a:latin typeface="PingFang SC" pitchFamily="34" charset="0"/>
+                <a:ea typeface="PingFang SC" pitchFamily="34" charset="-122"/>
+                <a:cs typeface="PingFang SC" pitchFamily="34" charset="-120"/>
+              </a:rPr>
+              <a:t>模块：OS 内核 MM · 压缩内存↔swap</a:t>
             </a:r>
             <a:endParaRPr lang="en-US" sz="1100" dirty="0"/>
           </a:p>
@@ -7055,7 +7278,7 @@
                 <a:ea typeface="PingFang SC" pitchFamily="34" charset="-122"/>
                 <a:cs typeface="PingFang SC" pitchFamily="34" charset="-120"/>
               </a:rPr>
-              <a:t>端侧内存型漏洞（UAF / 越界）频发，纯软件防护开销大</a:t>
+              <a:t>DRAM 有界且共享，通用 LRU 回收要么杀进程、要么卡顿</a:t>
             </a:r>
             <a:endParaRPr lang="en-US" sz="1450" dirty="0"/>
           </a:p>
@@ -7079,7 +7302,7 @@
                 <a:ea typeface="PingFang SC" pitchFamily="34" charset="-122"/>
                 <a:cs typeface="PingFang SC" pitchFamily="34" charset="-120"/>
               </a:rPr>
-              <a:t>端侧 ML 模型、KV 与记忆、生物识别等敏感数据需硬件隔离</a:t>
+              <a:t>冷页白占 DRAM；GB 级 App 冷启动频发（86.6% 越过 1 s 悬崖）</a:t>
             </a:r>
             <a:endParaRPr lang="en-US" sz="1450" dirty="0"/>
           </a:p>
@@ -7198,7 +7421,7 @@
                 <a:ea typeface="PingFang SC" pitchFamily="34" charset="-122"/>
                 <a:cs typeface="PingFang SC" pitchFamily="34" charset="-120"/>
               </a:rPr>
-              <a:t>ARM MTE 硬件内存标签：低开销实时抓内存错误</a:t>
+              <a:t>DRAM ↔ 压缩内存（zram/zswap ≈ 2:1）↔ Flash 三级分级</a:t>
             </a:r>
             <a:endParaRPr lang="en-US" sz="1450" dirty="0"/>
           </a:p>
@@ -7222,7 +7445,7 @@
                 <a:ea typeface="PingFang SC" pitchFamily="34" charset="-122"/>
                 <a:cs typeface="PingFang SC" pitchFamily="34" charset="-120"/>
               </a:rPr>
-              <a:t>CCA / RME 与 pKVM 机密计算，隔离端侧机密工作负载（ML 推理 / DRM / 生物识别）</a:t>
+              <a:t>MGLRU 冷热分代 + AppFlow 预测式预取 / 回收</a:t>
             </a:r>
             <a:endParaRPr lang="en-US" sz="1450" dirty="0"/>
           </a:p>
@@ -7245,11 +7468,11 @@
             </a:avLst>
           </a:prstGeom>
           <a:solidFill>
-            <a:srgbClr val="DC2626"/>
+            <a:srgbClr val="16A34A"/>
           </a:solidFill>
           <a:ln w="12700">
             <a:solidFill>
-              <a:srgbClr val="DC2626"/>
+              <a:srgbClr val="16A34A"/>
             </a:solidFill>
             <a:prstDash val="solid"/>
           </a:ln>
@@ -7295,7 +7518,7 @@
                 <a:ea typeface="PingFang SC" pitchFamily="34" charset="-122"/>
                 <a:cs typeface="PingFang SC" pitchFamily="34" charset="-120"/>
               </a:rPr>
-              <a:t>MTE</a:t>
+              <a:t>2s→690ms</a:t>
             </a:r>
             <a:endParaRPr lang="en-US" sz="3000" dirty="0"/>
           </a:p>
@@ -7334,7 +7557,7 @@
                 <a:ea typeface="PingFang SC" pitchFamily="34" charset="-122"/>
                 <a:cs typeface="PingFang SC" pitchFamily="34" charset="-120"/>
               </a:rPr>
-              <a:t>硬件内存标签</a:t>
+              <a:t>GB App 冷启动（AppFlow）</a:t>
             </a:r>
             <a:endParaRPr lang="en-US" sz="1200" dirty="0"/>
           </a:p>
@@ -7357,11 +7580,11 @@
             </a:avLst>
           </a:prstGeom>
           <a:solidFill>
-            <a:srgbClr val="DC2626"/>
+            <a:srgbClr val="16A34A"/>
           </a:solidFill>
           <a:ln w="12700">
             <a:solidFill>
-              <a:srgbClr val="DC2626"/>
+              <a:srgbClr val="16A34A"/>
             </a:solidFill>
             <a:prstDash val="solid"/>
           </a:ln>
@@ -7407,7 +7630,7 @@
                 <a:ea typeface="PingFang SC" pitchFamily="34" charset="-122"/>
                 <a:cs typeface="PingFang SC" pitchFamily="34" charset="-120"/>
               </a:rPr>
-              <a:t>pKVM</a:t>
+              <a:t>−85%</a:t>
             </a:r>
             <a:endParaRPr lang="en-US" sz="3000" dirty="0"/>
           </a:p>
@@ -7446,7 +7669,7 @@
                 <a:ea typeface="PingFang SC" pitchFamily="34" charset="-122"/>
                 <a:cs typeface="PingFang SC" pitchFamily="34" charset="-120"/>
               </a:rPr>
-              <a:t>端侧机密隔离</a:t>
+              <a:t>MGLRU 低内存杀进程</a:t>
             </a:r>
             <a:endParaRPr lang="en-US" sz="1200" dirty="0"/>
           </a:p>
@@ -7506,7 +7729,7 @@
             <a:r>
               <a:rPr lang="en-US" sz="1250" b="1" dirty="0">
                 <a:solidFill>
-                  <a:srgbClr val="DC2626"/>
+                  <a:srgbClr val="16A34A"/>
                 </a:solidFill>
                 <a:latin typeface="PingFang SC" pitchFamily="34" charset="0"/>
                 <a:ea typeface="PingFang SC" pitchFamily="34" charset="-122"/>
@@ -7551,7 +7774,7 @@
                 <a:ea typeface="PingFang SC" pitchFamily="34" charset="-122"/>
                 <a:cs typeface="PingFang SC" pitchFamily="34" charset="-120"/>
               </a:rPr>
-              <a:t>ARM 内存安全 / 机密计算：把「端侧内存型漏洞（UAF / 越界）频发」从问题变成可治理的设计点。</a:t>
+              <a:t>端侧分级内存：把「DRAM 有界且共享」从问题变成可治理的设计点。</a:t>
             </a:r>
             <a:endParaRPr lang="en-US" sz="1300" dirty="0"/>
           </a:p>
@@ -7590,7 +7813,7 @@
                 <a:ea typeface="PingFang SC" pitchFamily="34" charset="-122"/>
                 <a:cs typeface="PingFang SC" pitchFamily="34" charset="-120"/>
               </a:rPr>
-              <a:t>N+1 · 洞察 5 / 7</a:t>
+              <a:t>N+1 · 洞察 4 / 7</a:t>
             </a:r>
             <a:endParaRPr lang="en-US" sz="1000" dirty="0"/>
           </a:p>
@@ -7643,11 +7866,11 @@
             <a:avLst/>
           </a:prstGeom>
           <a:solidFill>
-            <a:srgbClr val="1D4ED8"/>
+            <a:srgbClr val="DC2626"/>
           </a:solidFill>
           <a:ln w="12700">
             <a:solidFill>
-              <a:srgbClr val="1D4ED8"/>
+              <a:srgbClr val="DC2626"/>
             </a:solidFill>
             <a:prstDash val="solid"/>
           </a:ln>
@@ -7686,7 +7909,7 @@
                 <a:ea typeface="PingFang SC" pitchFamily="34" charset="-122"/>
                 <a:cs typeface="PingFang SC" pitchFamily="34" charset="-120"/>
               </a:rPr>
-              <a:t>⑥</a:t>
+              <a:t>⑤</a:t>
             </a:r>
             <a:endParaRPr lang="en-US" sz="1800" dirty="0"/>
           </a:p>
@@ -7725,7 +7948,7 @@
                 <a:ea typeface="PingFang SC" pitchFamily="34" charset="-122"/>
                 <a:cs typeface="PingFang SC" pitchFamily="34" charset="-120"/>
               </a:rPr>
-              <a:t>Agent 外置分层记忆系统</a:t>
+              <a:t>ARM 内存安全 / 机密计算</a:t>
             </a:r>
             <a:endParaRPr lang="en-US" sz="3000" dirty="0"/>
           </a:p>
@@ -7752,7 +7975,7 @@
           </a:solidFill>
           <a:ln w="12700">
             <a:solidFill>
-              <a:srgbClr val="1D4ED8"/>
+              <a:srgbClr val="DC2626"/>
             </a:solidFill>
             <a:prstDash val="solid"/>
           </a:ln>
@@ -7785,13 +8008,13 @@
             <a:r>
               <a:rPr lang="en-US" sz="1100" b="1" dirty="0">
                 <a:solidFill>
-                  <a:srgbClr val="1D4ED8"/>
-                </a:solidFill>
-                <a:latin typeface="PingFang SC" pitchFamily="34" charset="0"/>
-                <a:ea typeface="PingFang SC" pitchFamily="34" charset="-122"/>
-                <a:cs typeface="PingFang SC" pitchFamily="34" charset="-120"/>
-              </a:rPr>
-              <a:t>模块：应用 / Agent 层</a:t>
+                  <a:srgbClr val="DC2626"/>
+                </a:solidFill>
+                <a:latin typeface="PingFang SC" pitchFamily="34" charset="0"/>
+                <a:ea typeface="PingFang SC" pitchFamily="34" charset="-122"/>
+                <a:cs typeface="PingFang SC" pitchFamily="34" charset="-120"/>
+              </a:rPr>
+              <a:t>模块：横切全栈数据面</a:t>
             </a:r>
             <a:endParaRPr lang="en-US" sz="1100" dirty="0"/>
           </a:p>
@@ -7910,7 +8133,7 @@
                 <a:ea typeface="PingFang SC" pitchFamily="34" charset="-122"/>
                 <a:cs typeface="PingFang SC" pitchFamily="34" charset="-120"/>
               </a:rPr>
-              <a:t>上下文窗口有限，每轮重放全历史使 token &gt;10×、p95 延迟约 11×</a:t>
+              <a:t>端侧内存型漏洞（UAF / 越界）频发，纯软件防护开销大</a:t>
             </a:r>
             <a:endParaRPr lang="en-US" sz="1450" dirty="0"/>
           </a:p>
@@ -7934,7 +8157,7 @@
                 <a:ea typeface="PingFang SC" pitchFamily="34" charset="-122"/>
                 <a:cs typeface="PingFang SC" pitchFamily="34" charset="-120"/>
               </a:rPr>
-              <a:t>截断历史则 Agent 遗忘，长程任务失败</a:t>
+              <a:t>端侧 ML 模型、KV 与记忆、生物识别等敏感数据需硬件隔离</a:t>
             </a:r>
             <a:endParaRPr lang="en-US" sz="1450" dirty="0"/>
           </a:p>
@@ -8053,7 +8276,7 @@
                 <a:ea typeface="PingFang SC" pitchFamily="34" charset="-122"/>
                 <a:cs typeface="PingFang SC" pitchFamily="34" charset="-120"/>
               </a:rPr>
-              <a:t>外置分层记忆 OS：STM → MTM → LPM，活跃工作集封顶（MemoryOS 仅 7 页）</a:t>
+              <a:t>ARM MTE 硬件内存标签：低开销实时抓内存错误</a:t>
             </a:r>
             <a:endParaRPr lang="en-US" sz="1450" dirty="0"/>
           </a:p>
@@ -8077,7 +8300,7 @@
                 <a:ea typeface="PingFang SC" pitchFamily="34" charset="-122"/>
                 <a:cs typeface="PingFang SC" pitchFamily="34" charset="-120"/>
               </a:rPr>
-              <a:t>按需检索代替全量重放，热记忆沉淀为画像</a:t>
+              <a:t>CCA / RME 与 pKVM 机密计算，隔离端侧机密工作负载（ML 推理 / DRM / 生物识别）</a:t>
             </a:r>
             <a:endParaRPr lang="en-US" sz="1450" dirty="0"/>
           </a:p>
@@ -8100,11 +8323,11 @@
             </a:avLst>
           </a:prstGeom>
           <a:solidFill>
-            <a:srgbClr val="1D4ED8"/>
+            <a:srgbClr val="DC2626"/>
           </a:solidFill>
           <a:ln w="12700">
             <a:solidFill>
-              <a:srgbClr val="1D4ED8"/>
+              <a:srgbClr val="DC2626"/>
             </a:solidFill>
             <a:prstDash val="solid"/>
           </a:ln>
@@ -8150,7 +8373,7 @@
                 <a:ea typeface="PingFang SC" pitchFamily="34" charset="-122"/>
                 <a:cs typeface="PingFang SC" pitchFamily="34" charset="-120"/>
               </a:rPr>
-              <a:t>−70~90%</a:t>
+              <a:t>MTE</a:t>
             </a:r>
             <a:endParaRPr lang="en-US" sz="3000" dirty="0"/>
           </a:p>
@@ -8189,7 +8412,7 @@
                 <a:ea typeface="PingFang SC" pitchFamily="34" charset="-122"/>
                 <a:cs typeface="PingFang SC" pitchFamily="34" charset="-120"/>
               </a:rPr>
-              <a:t>长会话 token 成本</a:t>
+              <a:t>硬件内存标签</a:t>
             </a:r>
             <a:endParaRPr lang="en-US" sz="1200" dirty="0"/>
           </a:p>
@@ -8212,11 +8435,11 @@
             </a:avLst>
           </a:prstGeom>
           <a:solidFill>
-            <a:srgbClr val="1D4ED8"/>
+            <a:srgbClr val="DC2626"/>
           </a:solidFill>
           <a:ln w="12700">
             <a:solidFill>
-              <a:srgbClr val="1D4ED8"/>
+              <a:srgbClr val="DC2626"/>
             </a:solidFill>
             <a:prstDash val="solid"/>
           </a:ln>
@@ -8262,7 +8485,7 @@
                 <a:ea typeface="PingFang SC" pitchFamily="34" charset="-122"/>
                 <a:cs typeface="PingFang SC" pitchFamily="34" charset="-120"/>
               </a:rPr>
-              <a:t>+26~49%</a:t>
+              <a:t>pKVM</a:t>
             </a:r>
             <a:endParaRPr lang="en-US" sz="3000" dirty="0"/>
           </a:p>
@@ -8301,7 +8524,7 @@
                 <a:ea typeface="PingFang SC" pitchFamily="34" charset="-122"/>
                 <a:cs typeface="PingFang SC" pitchFamily="34" charset="-120"/>
               </a:rPr>
-              <a:t>LoCoMo 精度</a:t>
+              <a:t>端侧机密隔离</a:t>
             </a:r>
             <a:endParaRPr lang="en-US" sz="1200" dirty="0"/>
           </a:p>
@@ -8361,7 +8584,7 @@
             <a:r>
               <a:rPr lang="en-US" sz="1250" b="1" dirty="0">
                 <a:solidFill>
-                  <a:srgbClr val="1D4ED8"/>
+                  <a:srgbClr val="DC2626"/>
                 </a:solidFill>
                 <a:latin typeface="PingFang SC" pitchFamily="34" charset="0"/>
                 <a:ea typeface="PingFang SC" pitchFamily="34" charset="-122"/>
@@ -8406,7 +8629,7 @@
                 <a:ea typeface="PingFang SC" pitchFamily="34" charset="-122"/>
                 <a:cs typeface="PingFang SC" pitchFamily="34" charset="-120"/>
               </a:rPr>
-              <a:t>Agent 外置分层记忆系统：把「上下文窗口有限」从问题变成可治理的设计点。</a:t>
+              <a:t>ARM 内存安全 / 机密计算：把「端侧内存型漏洞（UAF / 越界）频发」从问题变成可治理的设计点。</a:t>
             </a:r>
             <a:endParaRPr lang="en-US" sz="1300" dirty="0"/>
           </a:p>
@@ -8445,7 +8668,7 @@
                 <a:ea typeface="PingFang SC" pitchFamily="34" charset="-122"/>
                 <a:cs typeface="PingFang SC" pitchFamily="34" charset="-120"/>
               </a:rPr>
-              <a:t>N+1 · 洞察 6 / 7</a:t>
+              <a:t>N+1 · 洞察 5 / 7</a:t>
             </a:r>
             <a:endParaRPr lang="en-US" sz="1000" dirty="0"/>
           </a:p>
@@ -8498,11 +8721,11 @@
             <a:avLst/>
           </a:prstGeom>
           <a:solidFill>
-            <a:srgbClr val="7C3AED"/>
+            <a:srgbClr val="1D4ED8"/>
           </a:solidFill>
           <a:ln w="12700">
             <a:solidFill>
-              <a:srgbClr val="7C3AED"/>
+              <a:srgbClr val="1D4ED8"/>
             </a:solidFill>
             <a:prstDash val="solid"/>
           </a:ln>
@@ -8541,7 +8764,7 @@
                 <a:ea typeface="PingFang SC" pitchFamily="34" charset="-122"/>
                 <a:cs typeface="PingFang SC" pitchFamily="34" charset="-120"/>
               </a:rPr>
-              <a:t>⑦</a:t>
+              <a:t>⑥</a:t>
             </a:r>
             <a:endParaRPr lang="en-US" sz="1800" dirty="0"/>
           </a:p>
@@ -8580,7 +8803,7 @@
                 <a:ea typeface="PingFang SC" pitchFamily="34" charset="-122"/>
                 <a:cs typeface="PingFang SC" pitchFamily="34" charset="-120"/>
               </a:rPr>
-              <a:t>端云协同 · 千人千面冷热识别</a:t>
+              <a:t>Agent 外置分层记忆系统</a:t>
             </a:r>
             <a:endParaRPr lang="en-US" sz="3000" dirty="0"/>
           </a:p>
@@ -8607,7 +8830,7 @@
           </a:solidFill>
           <a:ln w="12700">
             <a:solidFill>
-              <a:srgbClr val="7C3AED"/>
+              <a:srgbClr val="1D4ED8"/>
             </a:solidFill>
             <a:prstDash val="solid"/>
           </a:ln>
@@ -8640,13 +8863,13 @@
             <a:r>
               <a:rPr lang="en-US" sz="1100" b="1" dirty="0">
                 <a:solidFill>
-                  <a:srgbClr val="7C3AED"/>
-                </a:solidFill>
-                <a:latin typeface="PingFang SC" pitchFamily="34" charset="0"/>
-                <a:ea typeface="PingFang SC" pitchFamily="34" charset="-122"/>
-                <a:cs typeface="PingFang SC" pitchFamily="34" charset="-120"/>
-              </a:rPr>
-              <a:t>模块：云侧大脑 ↔ 端侧全栈</a:t>
+                  <a:srgbClr val="1D4ED8"/>
+                </a:solidFill>
+                <a:latin typeface="PingFang SC" pitchFamily="34" charset="0"/>
+                <a:ea typeface="PingFang SC" pitchFamily="34" charset="-122"/>
+                <a:cs typeface="PingFang SC" pitchFamily="34" charset="-120"/>
+              </a:rPr>
+              <a:t>模块：应用 / Agent 层</a:t>
             </a:r>
             <a:endParaRPr lang="en-US" sz="1100" dirty="0"/>
           </a:p>
@@ -8765,7 +8988,7 @@
                 <a:ea typeface="PingFang SC" pitchFamily="34" charset="-122"/>
                 <a:cs typeface="PingFang SC" pitchFamily="34" charset="-120"/>
               </a:rPr>
-              <a:t>本地通用冷热策略一刀切，对每个用户 / 场景预测错（86.6% GB 冷启动 &gt;1 s）</a:t>
+              <a:t>上下文窗口有限，每轮重放全历史使 token &gt;10×、p95 延迟约 11×</a:t>
             </a:r>
             <a:endParaRPr lang="en-US" sz="1450" dirty="0"/>
           </a:p>
@@ -8789,7 +9012,7 @@
                 <a:ea typeface="PingFang SC" pitchFamily="34" charset="-122"/>
                 <a:cs typeface="PingFang SC" pitchFamily="34" charset="-120"/>
               </a:rPr>
-              <a:t>端侧学习器数据 / 算力 / 标签不足，独立学不出强个性化预测器</a:t>
+              <a:t>截断历史则 Agent 遗忘，长程任务失败</a:t>
             </a:r>
             <a:endParaRPr lang="en-US" sz="1450" dirty="0"/>
           </a:p>
@@ -8908,7 +9131,7 @@
                 <a:ea typeface="PingFang SC" pitchFamily="34" charset="-122"/>
                 <a:cs typeface="PingFang SC" pitchFamily="34" charset="-120"/>
               </a:rPr>
-              <a:t>端侧「小脑」个性化预测 + 云侧「大脑」聚合并下发千人千面策略</a:t>
+              <a:t>外置分层记忆 OS：STM → MTM → LPM，活跃工作集封顶（MemoryOS 仅 7 页）</a:t>
             </a:r>
             <a:endParaRPr lang="en-US" sz="1450" dirty="0"/>
           </a:p>
@@ -8932,7 +9155,7 @@
                 <a:ea typeface="PingFang SC" pitchFamily="34" charset="-122"/>
                 <a:cs typeface="PingFang SC" pitchFamily="34" charset="-120"/>
               </a:rPr>
-              <a:t>智能请求门控：仅约 5% 调云，原始行为留本地</a:t>
+              <a:t>按需检索代替全量重放，热记忆沉淀为画像</a:t>
             </a:r>
             <a:endParaRPr lang="en-US" sz="1450" dirty="0"/>
           </a:p>
@@ -8955,11 +9178,11 @@
             </a:avLst>
           </a:prstGeom>
           <a:solidFill>
-            <a:srgbClr val="7C3AED"/>
+            <a:srgbClr val="1D4ED8"/>
           </a:solidFill>
           <a:ln w="12700">
             <a:solidFill>
-              <a:srgbClr val="7C3AED"/>
+              <a:srgbClr val="1D4ED8"/>
             </a:solidFill>
             <a:prstDash val="solid"/>
           </a:ln>
@@ -9005,7 +9228,7 @@
                 <a:ea typeface="PingFang SC" pitchFamily="34" charset="-122"/>
                 <a:cs typeface="PingFang SC" pitchFamily="34" charset="-120"/>
               </a:rPr>
-              <a:t>仅 5%</a:t>
+              <a:t>−70~90%</a:t>
             </a:r>
             <a:endParaRPr lang="en-US" sz="3000" dirty="0"/>
           </a:p>
@@ -9044,7 +9267,7 @@
                 <a:ea typeface="PingFang SC" pitchFamily="34" charset="-122"/>
                 <a:cs typeface="PingFang SC" pitchFamily="34" charset="-120"/>
               </a:rPr>
-              <a:t>云端调用频率</a:t>
+              <a:t>长会话 token 成本</a:t>
             </a:r>
             <a:endParaRPr lang="en-US" sz="1200" dirty="0"/>
           </a:p>
@@ -9067,11 +9290,11 @@
             </a:avLst>
           </a:prstGeom>
           <a:solidFill>
-            <a:srgbClr val="7C3AED"/>
+            <a:srgbClr val="1D4ED8"/>
           </a:solidFill>
           <a:ln w="12700">
             <a:solidFill>
-              <a:srgbClr val="7C3AED"/>
+              <a:srgbClr val="1D4ED8"/>
             </a:solidFill>
             <a:prstDash val="solid"/>
           </a:ln>
@@ -9117,7 +9340,7 @@
                 <a:ea typeface="PingFang SC" pitchFamily="34" charset="-122"/>
                 <a:cs typeface="PingFang SC" pitchFamily="34" charset="-120"/>
               </a:rPr>
-              <a:t>+3.5~41%</a:t>
+              <a:t>+26~49%</a:t>
             </a:r>
             <a:endParaRPr lang="en-US" sz="3000" dirty="0"/>
           </a:p>
@@ -9156,7 +9379,7 @@
                 <a:ea typeface="PingFang SC" pitchFamily="34" charset="-122"/>
                 <a:cs typeface="PingFang SC" pitchFamily="34" charset="-120"/>
               </a:rPr>
-              <a:t>个性化精度增益</a:t>
+              <a:t>LoCoMo 精度</a:t>
             </a:r>
             <a:endParaRPr lang="en-US" sz="1200" dirty="0"/>
           </a:p>
@@ -9216,7 +9439,7 @@
             <a:r>
               <a:rPr lang="en-US" sz="1250" b="1" dirty="0">
                 <a:solidFill>
-                  <a:srgbClr val="7C3AED"/>
+                  <a:srgbClr val="1D4ED8"/>
                 </a:solidFill>
                 <a:latin typeface="PingFang SC" pitchFamily="34" charset="0"/>
                 <a:ea typeface="PingFang SC" pitchFamily="34" charset="-122"/>
@@ -9261,7 +9484,7 @@
                 <a:ea typeface="PingFang SC" pitchFamily="34" charset="-122"/>
                 <a:cs typeface="PingFang SC" pitchFamily="34" charset="-120"/>
               </a:rPr>
-              <a:t>端云协同 · 千人千面冷热识别：把「本地通用冷热策略一刀切」从问题变成可治理的设计点。</a:t>
+              <a:t>Agent 外置分层记忆系统：把「上下文窗口有限」从问题变成可治理的设计点。</a:t>
             </a:r>
             <a:endParaRPr lang="en-US" sz="1300" dirty="0"/>
           </a:p>
@@ -9300,7 +9523,7 @@
                 <a:ea typeface="PingFang SC" pitchFamily="34" charset="-122"/>
                 <a:cs typeface="PingFang SC" pitchFamily="34" charset="-120"/>
               </a:rPr>
-              <a:t>N+1 · 洞察 7 / 7</a:t>
+              <a:t>N+1 · 洞察 6 / 7</a:t>
             </a:r>
             <a:endParaRPr lang="en-US" sz="1000" dirty="0"/>
           </a:p>
